--- a/Proyecto Intermodular/Presentacion Ejecutiva/Presentación ejecutiva proyecto Inter modular.pptx
+++ b/Proyecto Intermodular/Presentacion Ejecutiva/Presentación ejecutiva proyecto Inter modular.pptx
@@ -6,8 +6,17 @@
   </p:sldMasterIdLst>
   <p:sldIdLst>
     <p:sldId id="256" r:id="rId2"/>
-    <p:sldId id="257" r:id="rId3"/>
-    <p:sldId id="258" r:id="rId4"/>
+    <p:sldId id="267" r:id="rId3"/>
+    <p:sldId id="260" r:id="rId4"/>
+    <p:sldId id="257" r:id="rId5"/>
+    <p:sldId id="258" r:id="rId6"/>
+    <p:sldId id="259" r:id="rId7"/>
+    <p:sldId id="266" r:id="rId8"/>
+    <p:sldId id="261" r:id="rId9"/>
+    <p:sldId id="262" r:id="rId10"/>
+    <p:sldId id="264" r:id="rId11"/>
+    <p:sldId id="263" r:id="rId12"/>
+    <p:sldId id="265" r:id="rId13"/>
   </p:sldIdLst>
   <p:sldSz cx="12192000" cy="6858000"/>
   <p:notesSz cx="6858000" cy="9144000"/>
@@ -106,6 +115,75 @@
       </a:defRPr>
     </a:lvl9pPr>
   </p:defaultTextStyle>
+  <p:extLst>
+    <p:ext uri="{521415D9-36F7-43E2-AB2F-B90AF26B5E84}">
+      <p14:sectionLst xmlns:p14="http://schemas.microsoft.com/office/powerpoint/2010/main">
+        <p14:section name="Sección predeterminada" id="{2FA019D3-B8BA-4D36-B708-37371A9FF4E7}">
+          <p14:sldIdLst>
+            <p14:sldId id="256"/>
+          </p14:sldIdLst>
+        </p14:section>
+        <p14:section name="Sección de resumen" id="{4F5D94DF-90ED-4C48-9CA8-D1B32CA9235E}">
+          <p14:sldIdLst>
+            <p14:sldId id="267"/>
+          </p14:sldIdLst>
+        </p14:section>
+        <p14:section name="Resumen ejecutivo " id="{1E3C7999-4C75-469F-9E2C-944799BB1ED1}">
+          <p14:sldIdLst>
+            <p14:sldId id="260"/>
+          </p14:sldIdLst>
+        </p14:section>
+        <p14:section name="Problema del mercado" id="{4CEFEB3D-A5F0-43F7-A338-07B768455403}">
+          <p14:sldIdLst>
+            <p14:sldId id="257"/>
+          </p14:sldIdLst>
+        </p14:section>
+        <p14:section name="Solución" id="{908F0865-14C1-4D7F-BF09-B3B3BD18A723}">
+          <p14:sldIdLst>
+            <p14:sldId id="258"/>
+          </p14:sldIdLst>
+        </p14:section>
+        <p14:section name="Principales funciones de la app" id="{C8238934-1115-4909-BA08-5C101B6AF4D7}">
+          <p14:sldIdLst>
+            <p14:sldId id="259"/>
+          </p14:sldIdLst>
+        </p14:section>
+        <p14:section name="Principales funciones de la web " id="{8BFEE87D-8D43-40D5-B808-5CAD0D815AED}">
+          <p14:sldIdLst>
+            <p14:sldId id="266"/>
+          </p14:sldIdLst>
+        </p14:section>
+        <p14:section name="Público Objetivo" id="{24139C22-E19D-403C-98AB-001BA44E1610}">
+          <p14:sldIdLst>
+            <p14:sldId id="261"/>
+          </p14:sldIdLst>
+        </p14:section>
+        <p14:section name="Funcionalidades Clave" id="{ACC6F00E-F84F-46FB-A41B-A495D697A415}">
+          <p14:sldIdLst>
+            <p14:sldId id="262"/>
+          </p14:sldIdLst>
+        </p14:section>
+        <p14:section name="Riesgos y Mitigación" id="{5C7A9DF9-09E6-4748-9368-A0249E6A317F}">
+          <p14:sldIdLst>
+            <p14:sldId id="264"/>
+          </p14:sldIdLst>
+        </p14:section>
+        <p14:section name="Indicadores de Éxito" id="{6A63F25A-FD89-48BF-99DF-3C5C11418BEE}">
+          <p14:sldIdLst>
+            <p14:sldId id="263"/>
+          </p14:sldIdLst>
+        </p14:section>
+        <p14:section name="Arquitectura Técnica" id="{FD2B0B56-932A-42D8-A918-2F86CFF44B38}">
+          <p14:sldIdLst>
+            <p14:sldId id="265"/>
+          </p14:sldIdLst>
+        </p14:section>
+      </p14:sectionLst>
+    </p:ext>
+    <p:ext uri="{EFAFB233-063F-42B5-8137-9DF3F51BA10A}">
+      <p15:sldGuideLst xmlns:p15="http://schemas.microsoft.com/office/powerpoint/2012/main"/>
+    </p:ext>
+  </p:extLst>
 </p:presentation>
 </file>
 
@@ -204,7 +282,7 @@
           <a:effectLst/>
           <a:extLst>
             <a:ext uri="{91240B29-F687-4f45-9708-019B960494DF}">
-              <a14:hiddenLine xmlns:a14="http://schemas.microsoft.com/office/drawing/2010/main" xmlns="" w="9525">
+              <a14:hiddenLine xmlns="" xmlns:a14="http://schemas.microsoft.com/office/drawing/2010/main" w="9525">
                 <a:solidFill>
                   <a:srgbClr val="000000"/>
                 </a:solidFill>
@@ -396,7 +474,7 @@
           <a:p>
             <a:fld id="{547F76F6-F94E-4BF7-8055-70C29B49F5B8}" type="datetimeFigureOut">
               <a:rPr lang="es-ES" smtClean="0"/>
-              <a:t>16/10/2025</a:t>
+              <a:t>18/10/2025</a:t>
             </a:fld>
             <a:endParaRPr lang="es-ES"/>
           </a:p>
@@ -714,7 +792,7 @@
           <a:p>
             <a:fld id="{547F76F6-F94E-4BF7-8055-70C29B49F5B8}" type="datetimeFigureOut">
               <a:rPr lang="es-ES" smtClean="0"/>
-              <a:t>16/10/2025</a:t>
+              <a:t>18/10/2025</a:t>
             </a:fld>
             <a:endParaRPr lang="es-ES"/>
           </a:p>
@@ -1202,7 +1280,7 @@
           <a:p>
             <a:fld id="{547F76F6-F94E-4BF7-8055-70C29B49F5B8}" type="datetimeFigureOut">
               <a:rPr lang="es-ES" smtClean="0"/>
-              <a:t>16/10/2025</a:t>
+              <a:t>18/10/2025</a:t>
             </a:fld>
             <a:endParaRPr lang="es-ES"/>
           </a:p>
@@ -1571,7 +1649,7 @@
           <a:p>
             <a:fld id="{547F76F6-F94E-4BF7-8055-70C29B49F5B8}" type="datetimeFigureOut">
               <a:rPr lang="es-ES" smtClean="0"/>
-              <a:t>16/10/2025</a:t>
+              <a:t>18/10/2025</a:t>
             </a:fld>
             <a:endParaRPr lang="es-ES"/>
           </a:p>
@@ -1726,7 +1804,7 @@
           <a:ln/>
           <a:extLst>
             <a:ext uri="{91240B29-F687-4f45-9708-019B960494DF}">
-              <a14:hiddenLine xmlns:a14="http://schemas.microsoft.com/office/drawing/2010/main" xmlns="" w="9525">
+              <a14:hiddenLine xmlns="" xmlns:a14="http://schemas.microsoft.com/office/drawing/2010/main" w="9525">
                 <a:solidFill>
                   <a:srgbClr val="000000"/>
                 </a:solidFill>
@@ -1844,7 +1922,7 @@
           <a:p>
             <a:fld id="{547F76F6-F94E-4BF7-8055-70C29B49F5B8}" type="datetimeFigureOut">
               <a:rPr lang="es-ES" smtClean="0"/>
-              <a:t>16/10/2025</a:t>
+              <a:t>18/10/2025</a:t>
             </a:fld>
             <a:endParaRPr lang="es-ES"/>
           </a:p>
@@ -2001,7 +2079,7 @@
           <a:ln/>
           <a:extLst>
             <a:ext uri="{91240B29-F687-4f45-9708-019B960494DF}">
-              <a14:hiddenLine xmlns:a14="http://schemas.microsoft.com/office/drawing/2010/main" xmlns="" w="9525">
+              <a14:hiddenLine xmlns="" xmlns:a14="http://schemas.microsoft.com/office/drawing/2010/main" w="9525">
                 <a:solidFill>
                   <a:srgbClr val="000000"/>
                 </a:solidFill>
@@ -2129,7 +2207,7 @@
           <a:p>
             <a:fld id="{547F76F6-F94E-4BF7-8055-70C29B49F5B8}" type="datetimeFigureOut">
               <a:rPr lang="es-ES" smtClean="0"/>
-              <a:t>16/10/2025</a:t>
+              <a:t>18/10/2025</a:t>
             </a:fld>
             <a:endParaRPr lang="es-ES"/>
           </a:p>
@@ -2284,7 +2362,7 @@
           <a:ln/>
           <a:extLst>
             <a:ext uri="{91240B29-F687-4f45-9708-019B960494DF}">
-              <a14:hiddenLine xmlns:a14="http://schemas.microsoft.com/office/drawing/2010/main" xmlns="" w="9525">
+              <a14:hiddenLine xmlns="" xmlns:a14="http://schemas.microsoft.com/office/drawing/2010/main" w="9525">
                 <a:solidFill>
                   <a:srgbClr val="000000"/>
                 </a:solidFill>
@@ -2412,7 +2490,7 @@
           <a:p>
             <a:fld id="{547F76F6-F94E-4BF7-8055-70C29B49F5B8}" type="datetimeFigureOut">
               <a:rPr lang="es-ES" smtClean="0"/>
-              <a:t>16/10/2025</a:t>
+              <a:t>18/10/2025</a:t>
             </a:fld>
             <a:endParaRPr lang="es-ES"/>
           </a:p>
@@ -2755,7 +2833,7 @@
           <a:p>
             <a:fld id="{547F76F6-F94E-4BF7-8055-70C29B49F5B8}" type="datetimeFigureOut">
               <a:rPr lang="es-ES" smtClean="0"/>
-              <a:t>16/10/2025</a:t>
+              <a:t>18/10/2025</a:t>
             </a:fld>
             <a:endParaRPr lang="es-ES"/>
           </a:p>
@@ -2910,7 +2988,7 @@
           <a:ln/>
           <a:extLst>
             <a:ext uri="{91240B29-F687-4f45-9708-019B960494DF}">
-              <a14:hiddenLine xmlns:a14="http://schemas.microsoft.com/office/drawing/2010/main" xmlns="" w="9525">
+              <a14:hiddenLine xmlns="" xmlns:a14="http://schemas.microsoft.com/office/drawing/2010/main" w="9525">
                 <a:solidFill>
                   <a:srgbClr val="000000"/>
                 </a:solidFill>
@@ -3094,7 +3172,7 @@
           <a:p>
             <a:fld id="{547F76F6-F94E-4BF7-8055-70C29B49F5B8}" type="datetimeFigureOut">
               <a:rPr lang="es-ES" smtClean="0"/>
-              <a:t>16/10/2025</a:t>
+              <a:t>18/10/2025</a:t>
             </a:fld>
             <a:endParaRPr lang="es-ES"/>
           </a:p>
@@ -3249,7 +3327,7 @@
           <a:ln/>
           <a:extLst>
             <a:ext uri="{91240B29-F687-4f45-9708-019B960494DF}">
-              <a14:hiddenLine xmlns:a14="http://schemas.microsoft.com/office/drawing/2010/main" xmlns="" w="9525">
+              <a14:hiddenLine xmlns="" xmlns:a14="http://schemas.microsoft.com/office/drawing/2010/main" w="9525">
                 <a:solidFill>
                   <a:srgbClr val="000000"/>
                 </a:solidFill>
@@ -3571,7 +3649,7 @@
           <a:p>
             <a:fld id="{547F76F6-F94E-4BF7-8055-70C29B49F5B8}" type="datetimeFigureOut">
               <a:rPr lang="es-ES" smtClean="0"/>
-              <a:t>16/10/2025</a:t>
+              <a:t>18/10/2025</a:t>
             </a:fld>
             <a:endParaRPr lang="es-ES"/>
           </a:p>
@@ -3726,7 +3804,7 @@
           <a:ln/>
           <a:extLst>
             <a:ext uri="{91240B29-F687-4f45-9708-019B960494DF}">
-              <a14:hiddenLine xmlns:a14="http://schemas.microsoft.com/office/drawing/2010/main" xmlns="" w="9525">
+              <a14:hiddenLine xmlns="" xmlns:a14="http://schemas.microsoft.com/office/drawing/2010/main" w="9525">
                 <a:solidFill>
                   <a:srgbClr val="000000"/>
                 </a:solidFill>
@@ -3792,7 +3870,7 @@
           <a:p>
             <a:fld id="{547F76F6-F94E-4BF7-8055-70C29B49F5B8}" type="datetimeFigureOut">
               <a:rPr lang="es-ES" smtClean="0"/>
-              <a:t>16/10/2025</a:t>
+              <a:t>18/10/2025</a:t>
             </a:fld>
             <a:endParaRPr lang="es-ES"/>
           </a:p>
@@ -3887,7 +3965,7 @@
           <a:p>
             <a:fld id="{547F76F6-F94E-4BF7-8055-70C29B49F5B8}" type="datetimeFigureOut">
               <a:rPr lang="es-ES" smtClean="0"/>
-              <a:t>16/10/2025</a:t>
+              <a:t>18/10/2025</a:t>
             </a:fld>
             <a:endParaRPr lang="es-ES"/>
           </a:p>
@@ -4155,7 +4233,7 @@
           <a:ln/>
           <a:extLst>
             <a:ext uri="{91240B29-F687-4f45-9708-019B960494DF}">
-              <a14:hiddenLine xmlns:a14="http://schemas.microsoft.com/office/drawing/2010/main" xmlns="" w="9525">
+              <a14:hiddenLine xmlns="" xmlns:a14="http://schemas.microsoft.com/office/drawing/2010/main" w="9525">
                 <a:solidFill>
                   <a:srgbClr val="000000"/>
                 </a:solidFill>
@@ -4354,7 +4432,7 @@
           <a:p>
             <a:fld id="{547F76F6-F94E-4BF7-8055-70C29B49F5B8}" type="datetimeFigureOut">
               <a:rPr lang="es-ES" smtClean="0"/>
-              <a:t>16/10/2025</a:t>
+              <a:t>18/10/2025</a:t>
             </a:fld>
             <a:endParaRPr lang="es-ES"/>
           </a:p>
@@ -4667,7 +4745,7 @@
           <a:p>
             <a:fld id="{547F76F6-F94E-4BF7-8055-70C29B49F5B8}" type="datetimeFigureOut">
               <a:rPr lang="es-ES" smtClean="0"/>
-              <a:t>16/10/2025</a:t>
+              <a:t>18/10/2025</a:t>
             </a:fld>
             <a:endParaRPr lang="es-ES"/>
           </a:p>
@@ -4937,7 +5015,7 @@
           <a:p>
             <a:fld id="{547F76F6-F94E-4BF7-8055-70C29B49F5B8}" type="datetimeFigureOut">
               <a:rPr lang="es-ES" smtClean="0"/>
-              <a:t>16/10/2025</a:t>
+              <a:t>18/10/2025</a:t>
             </a:fld>
             <a:endParaRPr lang="es-ES"/>
           </a:p>
@@ -5402,22 +5480,28 @@
             <p:ph type="ctrTitle"/>
           </p:nvPr>
         </p:nvSpPr>
-        <p:spPr/>
+        <p:spPr>
+          <a:xfrm>
+            <a:off x="810000" y="1095185"/>
+            <a:ext cx="10572000" cy="2971051"/>
+          </a:xfrm>
+        </p:spPr>
         <p:txBody>
           <a:bodyPr/>
           <a:lstStyle/>
           <a:p>
             <a:r>
-              <a:rPr lang="es-ES" dirty="0"/>
-              <a:t>Presentación ejecutiva proyecto Inter modular </a:t>
+              <a:rPr lang="es-ES" sz="4800" dirty="0"/>
+              <a:t>Presentación ejecutiva proyecto Inter modular Curso 25/26 </a:t>
             </a:r>
             <a:br>
-              <a:rPr lang="es-ES" dirty="0"/>
+              <a:rPr lang="es-ES" sz="4800" dirty="0"/>
             </a:br>
             <a:r>
-              <a:rPr lang="es-ES" dirty="0"/>
-              <a:t>Curso 25/26 </a:t>
-            </a:r>
+              <a:rPr lang="es-ES" sz="3200" dirty="0"/>
+              <a:t>Aplicación de gestión para club de pádel</a:t>
+            </a:r>
+            <a:endParaRPr lang="es-ES" dirty="0"/>
           </a:p>
         </p:txBody>
       </p:sp>
@@ -5460,10 +5544,1056 @@
           </a:p>
         </p:txBody>
       </p:sp>
+      <p:sp>
+        <p:nvSpPr>
+          <p:cNvPr id="4" name="Subtítulo 2">
+            <a:extLst>
+              <a:ext uri="{FF2B5EF4-FFF2-40B4-BE49-F238E27FC236}">
+                <a16:creationId xmlns:a16="http://schemas.microsoft.com/office/drawing/2014/main" id="{CFE0C605-5DCC-1732-F0DD-6F9E7BD22946}"/>
+              </a:ext>
+            </a:extLst>
+          </p:cNvPr>
+          <p:cNvSpPr txBox="1">
+            <a:spLocks/>
+          </p:cNvSpPr>
+          <p:nvPr/>
+        </p:nvSpPr>
+        <p:spPr>
+          <a:xfrm>
+            <a:off x="0" y="54459"/>
+            <a:ext cx="1933395" cy="449074"/>
+          </a:xfrm>
+          <a:prstGeom prst="rect">
+            <a:avLst/>
+          </a:prstGeom>
+          <a:effectLst>
+            <a:outerShdw blurRad="50800" dir="14400000">
+              <a:srgbClr val="000000">
+                <a:alpha val="40000"/>
+              </a:srgbClr>
+            </a:outerShdw>
+          </a:effectLst>
+        </p:spPr>
+        <p:txBody>
+          <a:bodyPr vert="horz" lIns="91440" tIns="45720" rIns="91440" bIns="45720" rtlCol="0" anchor="t">
+            <a:normAutofit lnSpcReduction="10000"/>
+          </a:bodyPr>
+          <a:lstStyle>
+            <a:lvl1pPr marL="0" indent="0" algn="l" defTabSz="457200" rtl="0" eaLnBrk="1" latinLnBrk="0" hangingPunct="1">
+              <a:spcBef>
+                <a:spcPct val="20000"/>
+              </a:spcBef>
+              <a:spcAft>
+                <a:spcPts val="600"/>
+              </a:spcAft>
+              <a:buClr>
+                <a:schemeClr val="accent1"/>
+              </a:buClr>
+              <a:buFont typeface="Wingdings 2" charset="2"/>
+              <a:buNone/>
+              <a:defRPr sz="1800" kern="1200">
+                <a:solidFill>
+                  <a:schemeClr val="tx1"/>
+                </a:solidFill>
+                <a:latin typeface="+mn-lt"/>
+                <a:ea typeface="+mn-ea"/>
+                <a:cs typeface="+mn-cs"/>
+              </a:defRPr>
+            </a:lvl1pPr>
+            <a:lvl2pPr marL="457200" indent="0" algn="ctr" defTabSz="457200" rtl="0" eaLnBrk="1" latinLnBrk="0" hangingPunct="1">
+              <a:spcBef>
+                <a:spcPct val="20000"/>
+              </a:spcBef>
+              <a:spcAft>
+                <a:spcPts val="600"/>
+              </a:spcAft>
+              <a:buClr>
+                <a:schemeClr val="accent1"/>
+              </a:buClr>
+              <a:buFont typeface="Wingdings 2" charset="2"/>
+              <a:buNone/>
+              <a:defRPr sz="1600" kern="1200">
+                <a:solidFill>
+                  <a:schemeClr val="tx1">
+                    <a:tint val="75000"/>
+                  </a:schemeClr>
+                </a:solidFill>
+                <a:latin typeface="+mn-lt"/>
+                <a:ea typeface="+mn-ea"/>
+                <a:cs typeface="+mn-cs"/>
+              </a:defRPr>
+            </a:lvl2pPr>
+            <a:lvl3pPr marL="914400" indent="0" algn="ctr" defTabSz="457200" rtl="0" eaLnBrk="1" latinLnBrk="0" hangingPunct="1">
+              <a:spcBef>
+                <a:spcPct val="20000"/>
+              </a:spcBef>
+              <a:spcAft>
+                <a:spcPts val="600"/>
+              </a:spcAft>
+              <a:buClr>
+                <a:schemeClr val="accent1"/>
+              </a:buClr>
+              <a:buFont typeface="Wingdings 2" charset="2"/>
+              <a:buNone/>
+              <a:defRPr sz="1400" kern="1200">
+                <a:solidFill>
+                  <a:schemeClr val="tx1">
+                    <a:tint val="75000"/>
+                  </a:schemeClr>
+                </a:solidFill>
+                <a:latin typeface="+mn-lt"/>
+                <a:ea typeface="+mn-ea"/>
+                <a:cs typeface="+mn-cs"/>
+              </a:defRPr>
+            </a:lvl3pPr>
+            <a:lvl4pPr marL="1371600" indent="0" algn="ctr" defTabSz="457200" rtl="0" eaLnBrk="1" latinLnBrk="0" hangingPunct="1">
+              <a:spcBef>
+                <a:spcPct val="20000"/>
+              </a:spcBef>
+              <a:spcAft>
+                <a:spcPts val="600"/>
+              </a:spcAft>
+              <a:buClr>
+                <a:schemeClr val="accent1"/>
+              </a:buClr>
+              <a:buFont typeface="Wingdings 2" charset="2"/>
+              <a:buNone/>
+              <a:defRPr sz="1200" kern="1200">
+                <a:solidFill>
+                  <a:schemeClr val="tx1">
+                    <a:tint val="75000"/>
+                  </a:schemeClr>
+                </a:solidFill>
+                <a:latin typeface="+mn-lt"/>
+                <a:ea typeface="+mn-ea"/>
+                <a:cs typeface="+mn-cs"/>
+              </a:defRPr>
+            </a:lvl4pPr>
+            <a:lvl5pPr marL="1828800" indent="0" algn="ctr" defTabSz="457200" rtl="0" eaLnBrk="1" latinLnBrk="0" hangingPunct="1">
+              <a:spcBef>
+                <a:spcPct val="20000"/>
+              </a:spcBef>
+              <a:spcAft>
+                <a:spcPts val="600"/>
+              </a:spcAft>
+              <a:buClr>
+                <a:schemeClr val="accent1"/>
+              </a:buClr>
+              <a:buFont typeface="Wingdings 2" charset="2"/>
+              <a:buNone/>
+              <a:defRPr sz="1200" kern="1200">
+                <a:solidFill>
+                  <a:schemeClr val="tx1">
+                    <a:tint val="75000"/>
+                  </a:schemeClr>
+                </a:solidFill>
+                <a:latin typeface="+mn-lt"/>
+                <a:ea typeface="+mn-ea"/>
+                <a:cs typeface="+mn-cs"/>
+              </a:defRPr>
+            </a:lvl5pPr>
+            <a:lvl6pPr marL="2286000" indent="0" algn="ctr" defTabSz="457200" rtl="0" eaLnBrk="1" latinLnBrk="0" hangingPunct="1">
+              <a:spcBef>
+                <a:spcPct val="20000"/>
+              </a:spcBef>
+              <a:spcAft>
+                <a:spcPts val="600"/>
+              </a:spcAft>
+              <a:buClr>
+                <a:schemeClr val="accent1"/>
+              </a:buClr>
+              <a:buFont typeface="Wingdings 2" charset="2"/>
+              <a:buNone/>
+              <a:defRPr sz="1200" kern="1200">
+                <a:solidFill>
+                  <a:schemeClr val="tx1">
+                    <a:tint val="75000"/>
+                  </a:schemeClr>
+                </a:solidFill>
+                <a:latin typeface="+mn-lt"/>
+                <a:ea typeface="+mn-ea"/>
+                <a:cs typeface="+mn-cs"/>
+              </a:defRPr>
+            </a:lvl6pPr>
+            <a:lvl7pPr marL="2743200" indent="0" algn="ctr" defTabSz="457200" rtl="0" eaLnBrk="1" latinLnBrk="0" hangingPunct="1">
+              <a:spcBef>
+                <a:spcPct val="20000"/>
+              </a:spcBef>
+              <a:spcAft>
+                <a:spcPts val="600"/>
+              </a:spcAft>
+              <a:buClr>
+                <a:schemeClr val="accent1"/>
+              </a:buClr>
+              <a:buFont typeface="Wingdings 2" charset="2"/>
+              <a:buNone/>
+              <a:defRPr sz="1200" kern="1200">
+                <a:solidFill>
+                  <a:schemeClr val="tx1">
+                    <a:tint val="75000"/>
+                  </a:schemeClr>
+                </a:solidFill>
+                <a:latin typeface="+mn-lt"/>
+                <a:ea typeface="+mn-ea"/>
+                <a:cs typeface="+mn-cs"/>
+              </a:defRPr>
+            </a:lvl7pPr>
+            <a:lvl8pPr marL="3200400" indent="0" algn="ctr" defTabSz="457200" rtl="0" eaLnBrk="1" latinLnBrk="0" hangingPunct="1">
+              <a:spcBef>
+                <a:spcPct val="20000"/>
+              </a:spcBef>
+              <a:spcAft>
+                <a:spcPts val="600"/>
+              </a:spcAft>
+              <a:buClr>
+                <a:schemeClr val="accent1"/>
+              </a:buClr>
+              <a:buFont typeface="Wingdings 2" charset="2"/>
+              <a:buNone/>
+              <a:defRPr sz="1200" kern="1200">
+                <a:solidFill>
+                  <a:schemeClr val="tx1">
+                    <a:tint val="75000"/>
+                  </a:schemeClr>
+                </a:solidFill>
+                <a:latin typeface="+mn-lt"/>
+                <a:ea typeface="+mn-ea"/>
+                <a:cs typeface="+mn-cs"/>
+              </a:defRPr>
+            </a:lvl8pPr>
+            <a:lvl9pPr marL="3657600" indent="0" algn="ctr" defTabSz="457200" rtl="0" eaLnBrk="1" latinLnBrk="0" hangingPunct="1">
+              <a:spcBef>
+                <a:spcPct val="20000"/>
+              </a:spcBef>
+              <a:spcAft>
+                <a:spcPts val="600"/>
+              </a:spcAft>
+              <a:buClr>
+                <a:schemeClr val="accent1"/>
+              </a:buClr>
+              <a:buFont typeface="Wingdings 2" charset="2"/>
+              <a:buNone/>
+              <a:defRPr sz="1200" kern="1200">
+                <a:solidFill>
+                  <a:schemeClr val="tx1">
+                    <a:tint val="75000"/>
+                  </a:schemeClr>
+                </a:solidFill>
+                <a:latin typeface="+mn-lt"/>
+                <a:ea typeface="+mn-ea"/>
+                <a:cs typeface="+mn-cs"/>
+              </a:defRPr>
+            </a:lvl9pPr>
+          </a:lstStyle>
+          <a:p>
+            <a:r>
+              <a:rPr lang="es-ES" sz="2400" dirty="0"/>
+              <a:t>18/10/2025</a:t>
+            </a:r>
+          </a:p>
+        </p:txBody>
+      </p:sp>
     </p:spTree>
     <p:extLst>
       <p:ext uri="{BB962C8B-B14F-4D97-AF65-F5344CB8AC3E}">
         <p14:creationId xmlns:p14="http://schemas.microsoft.com/office/powerpoint/2010/main" val="2716828339"/>
+      </p:ext>
+    </p:extLst>
+  </p:cSld>
+  <p:clrMapOvr>
+    <a:masterClrMapping/>
+  </p:clrMapOvr>
+</p:sld>
+</file>
+
+<file path=ppt/slides/slide10.xml><?xml version="1.0" encoding="utf-8"?>
+<p:sld xmlns:a="http://schemas.openxmlformats.org/drawingml/2006/main" xmlns:r="http://schemas.openxmlformats.org/officeDocument/2006/relationships" xmlns:p="http://schemas.openxmlformats.org/presentationml/2006/main">
+  <p:cSld>
+    <p:spTree>
+      <p:nvGrpSpPr>
+        <p:cNvPr id="1" name=""/>
+        <p:cNvGrpSpPr/>
+        <p:nvPr/>
+      </p:nvGrpSpPr>
+      <p:grpSpPr>
+        <a:xfrm>
+          <a:off x="0" y="0"/>
+          <a:ext cx="0" cy="0"/>
+          <a:chOff x="0" y="0"/>
+          <a:chExt cx="0" cy="0"/>
+        </a:xfrm>
+      </p:grpSpPr>
+      <p:sp>
+        <p:nvSpPr>
+          <p:cNvPr id="2" name="Título 1">
+            <a:extLst>
+              <a:ext uri="{FF2B5EF4-FFF2-40B4-BE49-F238E27FC236}">
+                <a16:creationId xmlns:a16="http://schemas.microsoft.com/office/drawing/2014/main" id="{DF08EE16-9DB7-CF42-3D5E-0B67C00E2967}"/>
+              </a:ext>
+            </a:extLst>
+          </p:cNvPr>
+          <p:cNvSpPr>
+            <a:spLocks noGrp="1"/>
+          </p:cNvSpPr>
+          <p:nvPr>
+            <p:ph type="title"/>
+          </p:nvPr>
+        </p:nvSpPr>
+        <p:spPr/>
+        <p:txBody>
+          <a:bodyPr/>
+          <a:lstStyle/>
+          <a:p>
+            <a:r>
+              <a:rPr lang="es-ES" dirty="0"/>
+              <a:t>Riesgos y Mitigación</a:t>
+            </a:r>
+          </a:p>
+        </p:txBody>
+      </p:sp>
+      <p:graphicFrame>
+        <p:nvGraphicFramePr>
+          <p:cNvPr id="4" name="Marcador de contenido 3">
+            <a:extLst>
+              <a:ext uri="{FF2B5EF4-FFF2-40B4-BE49-F238E27FC236}">
+                <a16:creationId xmlns:a16="http://schemas.microsoft.com/office/drawing/2014/main" id="{9B0C9212-DA93-0DA1-BDD9-6B135AF5B53A}"/>
+              </a:ext>
+            </a:extLst>
+          </p:cNvPr>
+          <p:cNvGraphicFramePr>
+            <a:graphicFrameLocks noGrp="1"/>
+          </p:cNvGraphicFramePr>
+          <p:nvPr>
+            <p:ph idx="1"/>
+            <p:extLst>
+              <p:ext uri="{D42A27DB-BD31-4B8C-83A1-F6EECF244321}">
+                <p14:modId xmlns:p14="http://schemas.microsoft.com/office/powerpoint/2010/main" val="216752897"/>
+              </p:ext>
+            </p:extLst>
+          </p:nvPr>
+        </p:nvGraphicFramePr>
+        <p:xfrm>
+          <a:off x="602840" y="2375560"/>
+          <a:ext cx="10553700" cy="3789268"/>
+        </p:xfrm>
+        <a:graphic>
+          <a:graphicData uri="http://schemas.openxmlformats.org/drawingml/2006/table">
+            <a:tbl>
+              <a:tblPr/>
+              <a:tblGrid>
+                <a:gridCol w="5276850">
+                  <a:extLst>
+                    <a:ext uri="{9D8B030D-6E8A-4147-A177-3AD203B41FA5}">
+                      <a16:colId xmlns:a16="http://schemas.microsoft.com/office/drawing/2014/main" val="1631830309"/>
+                    </a:ext>
+                  </a:extLst>
+                </a:gridCol>
+                <a:gridCol w="5276850">
+                  <a:extLst>
+                    <a:ext uri="{9D8B030D-6E8A-4147-A177-3AD203B41FA5}">
+                      <a16:colId xmlns:a16="http://schemas.microsoft.com/office/drawing/2014/main" val="1678392760"/>
+                    </a:ext>
+                  </a:extLst>
+                </a:gridCol>
+              </a:tblGrid>
+              <a:tr h="947317">
+                <a:tc>
+                  <a:txBody>
+                    <a:bodyPr/>
+                    <a:lstStyle/>
+                    <a:p>
+                      <a:pPr algn="ctr">
+                        <a:buNone/>
+                      </a:pPr>
+                      <a:r>
+                        <a:rPr lang="es-ES" sz="1800" dirty="0"/>
+                        <a:t>Riesgo</a:t>
+                      </a:r>
+                    </a:p>
+                  </a:txBody>
+                  <a:tcPr marL="91358" marR="91358" marT="45679" marB="45679" anchor="ctr">
+                    <a:lnL w="12700" cap="flat" cmpd="sng" algn="ctr">
+                      <a:solidFill>
+                        <a:schemeClr val="tx1"/>
+                      </a:solidFill>
+                      <a:prstDash val="solid"/>
+                      <a:round/>
+                      <a:headEnd type="none" w="med" len="med"/>
+                      <a:tailEnd type="none" w="med" len="med"/>
+                    </a:lnL>
+                    <a:lnR w="12700" cap="flat" cmpd="sng" algn="ctr">
+                      <a:solidFill>
+                        <a:schemeClr val="tx1"/>
+                      </a:solidFill>
+                      <a:prstDash val="solid"/>
+                      <a:round/>
+                      <a:headEnd type="none" w="med" len="med"/>
+                      <a:tailEnd type="none" w="med" len="med"/>
+                    </a:lnR>
+                    <a:lnT w="12700" cap="flat" cmpd="sng" algn="ctr">
+                      <a:solidFill>
+                        <a:schemeClr val="tx1"/>
+                      </a:solidFill>
+                      <a:prstDash val="solid"/>
+                      <a:round/>
+                      <a:headEnd type="none" w="med" len="med"/>
+                      <a:tailEnd type="none" w="med" len="med"/>
+                    </a:lnT>
+                    <a:lnB w="12700" cap="flat" cmpd="sng" algn="ctr">
+                      <a:solidFill>
+                        <a:schemeClr val="tx1"/>
+                      </a:solidFill>
+                      <a:prstDash val="solid"/>
+                      <a:round/>
+                      <a:headEnd type="none" w="med" len="med"/>
+                      <a:tailEnd type="none" w="med" len="med"/>
+                    </a:lnB>
+                    <a:noFill/>
+                  </a:tcPr>
+                </a:tc>
+                <a:tc>
+                  <a:txBody>
+                    <a:bodyPr/>
+                    <a:lstStyle/>
+                    <a:p>
+                      <a:pPr algn="ctr">
+                        <a:buNone/>
+                      </a:pPr>
+                      <a:r>
+                        <a:rPr lang="es-ES" sz="1800" dirty="0"/>
+                        <a:t>Mitigación</a:t>
+                      </a:r>
+                    </a:p>
+                  </a:txBody>
+                  <a:tcPr marL="91358" marR="91358" marT="45679" marB="45679" anchor="ctr">
+                    <a:lnL w="12700" cap="flat" cmpd="sng" algn="ctr">
+                      <a:solidFill>
+                        <a:schemeClr val="tx1"/>
+                      </a:solidFill>
+                      <a:prstDash val="solid"/>
+                      <a:round/>
+                      <a:headEnd type="none" w="med" len="med"/>
+                      <a:tailEnd type="none" w="med" len="med"/>
+                    </a:lnL>
+                    <a:lnR w="12700" cap="flat" cmpd="sng" algn="ctr">
+                      <a:solidFill>
+                        <a:schemeClr val="tx1"/>
+                      </a:solidFill>
+                      <a:prstDash val="solid"/>
+                      <a:round/>
+                      <a:headEnd type="none" w="med" len="med"/>
+                      <a:tailEnd type="none" w="med" len="med"/>
+                    </a:lnR>
+                    <a:lnT w="12700" cap="flat" cmpd="sng" algn="ctr">
+                      <a:solidFill>
+                        <a:schemeClr val="tx1"/>
+                      </a:solidFill>
+                      <a:prstDash val="solid"/>
+                      <a:round/>
+                      <a:headEnd type="none" w="med" len="med"/>
+                      <a:tailEnd type="none" w="med" len="med"/>
+                    </a:lnT>
+                    <a:lnB w="12700" cap="flat" cmpd="sng" algn="ctr">
+                      <a:solidFill>
+                        <a:schemeClr val="tx1"/>
+                      </a:solidFill>
+                      <a:prstDash val="solid"/>
+                      <a:round/>
+                      <a:headEnd type="none" w="med" len="med"/>
+                      <a:tailEnd type="none" w="med" len="med"/>
+                    </a:lnB>
+                    <a:noFill/>
+                  </a:tcPr>
+                </a:tc>
+                <a:extLst>
+                  <a:ext uri="{0D108BD9-81ED-4DB2-BD59-A6C34878D82A}">
+                    <a16:rowId xmlns:a16="http://schemas.microsoft.com/office/drawing/2014/main" val="1971076246"/>
+                  </a:ext>
+                </a:extLst>
+              </a:tr>
+              <a:tr h="947317">
+                <a:tc>
+                  <a:txBody>
+                    <a:bodyPr/>
+                    <a:lstStyle/>
+                    <a:p>
+                      <a:pPr>
+                        <a:buNone/>
+                      </a:pPr>
+                      <a:r>
+                        <a:rPr lang="es-ES" sz="1800" dirty="0"/>
+                        <a:t>Baja adopción por parte de socios</a:t>
+                      </a:r>
+                    </a:p>
+                  </a:txBody>
+                  <a:tcPr marL="91358" marR="91358" marT="45679" marB="45679" anchor="ctr">
+                    <a:lnL w="12700" cap="flat" cmpd="sng" algn="ctr">
+                      <a:solidFill>
+                        <a:schemeClr val="tx1"/>
+                      </a:solidFill>
+                      <a:prstDash val="solid"/>
+                      <a:round/>
+                      <a:headEnd type="none" w="med" len="med"/>
+                      <a:tailEnd type="none" w="med" len="med"/>
+                    </a:lnL>
+                    <a:lnR w="12700" cap="flat" cmpd="sng" algn="ctr">
+                      <a:solidFill>
+                        <a:schemeClr val="tx1"/>
+                      </a:solidFill>
+                      <a:prstDash val="solid"/>
+                      <a:round/>
+                      <a:headEnd type="none" w="med" len="med"/>
+                      <a:tailEnd type="none" w="med" len="med"/>
+                    </a:lnR>
+                    <a:lnT w="12700" cap="flat" cmpd="sng" algn="ctr">
+                      <a:solidFill>
+                        <a:schemeClr val="tx1"/>
+                      </a:solidFill>
+                      <a:prstDash val="solid"/>
+                      <a:round/>
+                      <a:headEnd type="none" w="med" len="med"/>
+                      <a:tailEnd type="none" w="med" len="med"/>
+                    </a:lnT>
+                    <a:lnB w="12700" cap="flat" cmpd="sng" algn="ctr">
+                      <a:solidFill>
+                        <a:schemeClr val="tx1"/>
+                      </a:solidFill>
+                      <a:prstDash val="solid"/>
+                      <a:round/>
+                      <a:headEnd type="none" w="med" len="med"/>
+                      <a:tailEnd type="none" w="med" len="med"/>
+                    </a:lnB>
+                    <a:noFill/>
+                  </a:tcPr>
+                </a:tc>
+                <a:tc>
+                  <a:txBody>
+                    <a:bodyPr/>
+                    <a:lstStyle/>
+                    <a:p>
+                      <a:pPr>
+                        <a:buNone/>
+                      </a:pPr>
+                      <a:r>
+                        <a:rPr lang="es-ES" sz="1800" dirty="0"/>
+                        <a:t>Formación y soporte personalizado</a:t>
+                      </a:r>
+                    </a:p>
+                  </a:txBody>
+                  <a:tcPr marL="91358" marR="91358" marT="45679" marB="45679" anchor="ctr">
+                    <a:lnL w="12700" cap="flat" cmpd="sng" algn="ctr">
+                      <a:solidFill>
+                        <a:schemeClr val="tx1"/>
+                      </a:solidFill>
+                      <a:prstDash val="solid"/>
+                      <a:round/>
+                      <a:headEnd type="none" w="med" len="med"/>
+                      <a:tailEnd type="none" w="med" len="med"/>
+                    </a:lnL>
+                    <a:lnR w="12700" cap="flat" cmpd="sng" algn="ctr">
+                      <a:solidFill>
+                        <a:schemeClr val="tx1"/>
+                      </a:solidFill>
+                      <a:prstDash val="solid"/>
+                      <a:round/>
+                      <a:headEnd type="none" w="med" len="med"/>
+                      <a:tailEnd type="none" w="med" len="med"/>
+                    </a:lnR>
+                    <a:lnT w="12700" cap="flat" cmpd="sng" algn="ctr">
+                      <a:solidFill>
+                        <a:schemeClr val="tx1"/>
+                      </a:solidFill>
+                      <a:prstDash val="solid"/>
+                      <a:round/>
+                      <a:headEnd type="none" w="med" len="med"/>
+                      <a:tailEnd type="none" w="med" len="med"/>
+                    </a:lnT>
+                    <a:lnB w="12700" cap="flat" cmpd="sng" algn="ctr">
+                      <a:solidFill>
+                        <a:schemeClr val="tx1"/>
+                      </a:solidFill>
+                      <a:prstDash val="solid"/>
+                      <a:round/>
+                      <a:headEnd type="none" w="med" len="med"/>
+                      <a:tailEnd type="none" w="med" len="med"/>
+                    </a:lnB>
+                    <a:noFill/>
+                  </a:tcPr>
+                </a:tc>
+                <a:extLst>
+                  <a:ext uri="{0D108BD9-81ED-4DB2-BD59-A6C34878D82A}">
+                    <a16:rowId xmlns:a16="http://schemas.microsoft.com/office/drawing/2014/main" val="536255157"/>
+                  </a:ext>
+                </a:extLst>
+              </a:tr>
+              <a:tr h="947317">
+                <a:tc>
+                  <a:txBody>
+                    <a:bodyPr/>
+                    <a:lstStyle/>
+                    <a:p>
+                      <a:pPr>
+                        <a:buNone/>
+                      </a:pPr>
+                      <a:r>
+                        <a:rPr lang="es-ES" sz="1800"/>
+                        <a:t>Problemas técnicos iniciales</a:t>
+                      </a:r>
+                    </a:p>
+                  </a:txBody>
+                  <a:tcPr marL="91358" marR="91358" marT="45679" marB="45679" anchor="ctr">
+                    <a:lnL w="12700" cap="flat" cmpd="sng" algn="ctr">
+                      <a:solidFill>
+                        <a:schemeClr val="tx1"/>
+                      </a:solidFill>
+                      <a:prstDash val="solid"/>
+                      <a:round/>
+                      <a:headEnd type="none" w="med" len="med"/>
+                      <a:tailEnd type="none" w="med" len="med"/>
+                    </a:lnL>
+                    <a:lnR w="12700" cap="flat" cmpd="sng" algn="ctr">
+                      <a:solidFill>
+                        <a:schemeClr val="tx1"/>
+                      </a:solidFill>
+                      <a:prstDash val="solid"/>
+                      <a:round/>
+                      <a:headEnd type="none" w="med" len="med"/>
+                      <a:tailEnd type="none" w="med" len="med"/>
+                    </a:lnR>
+                    <a:lnT w="12700" cap="flat" cmpd="sng" algn="ctr">
+                      <a:solidFill>
+                        <a:schemeClr val="tx1"/>
+                      </a:solidFill>
+                      <a:prstDash val="solid"/>
+                      <a:round/>
+                      <a:headEnd type="none" w="med" len="med"/>
+                      <a:tailEnd type="none" w="med" len="med"/>
+                    </a:lnT>
+                    <a:lnB w="12700" cap="flat" cmpd="sng" algn="ctr">
+                      <a:solidFill>
+                        <a:schemeClr val="tx1"/>
+                      </a:solidFill>
+                      <a:prstDash val="solid"/>
+                      <a:round/>
+                      <a:headEnd type="none" w="med" len="med"/>
+                      <a:tailEnd type="none" w="med" len="med"/>
+                    </a:lnB>
+                    <a:noFill/>
+                  </a:tcPr>
+                </a:tc>
+                <a:tc>
+                  <a:txBody>
+                    <a:bodyPr/>
+                    <a:lstStyle/>
+                    <a:p>
+                      <a:pPr>
+                        <a:buNone/>
+                      </a:pPr>
+                      <a:r>
+                        <a:rPr lang="es-ES" sz="1800" dirty="0"/>
+                        <a:t>Fase de pruebas + soporte continuo</a:t>
+                      </a:r>
+                    </a:p>
+                  </a:txBody>
+                  <a:tcPr marL="91358" marR="91358" marT="45679" marB="45679" anchor="ctr">
+                    <a:lnL w="12700" cap="flat" cmpd="sng" algn="ctr">
+                      <a:solidFill>
+                        <a:schemeClr val="tx1"/>
+                      </a:solidFill>
+                      <a:prstDash val="solid"/>
+                      <a:round/>
+                      <a:headEnd type="none" w="med" len="med"/>
+                      <a:tailEnd type="none" w="med" len="med"/>
+                    </a:lnL>
+                    <a:lnR w="12700" cap="flat" cmpd="sng" algn="ctr">
+                      <a:solidFill>
+                        <a:schemeClr val="tx1"/>
+                      </a:solidFill>
+                      <a:prstDash val="solid"/>
+                      <a:round/>
+                      <a:headEnd type="none" w="med" len="med"/>
+                      <a:tailEnd type="none" w="med" len="med"/>
+                    </a:lnR>
+                    <a:lnT w="12700" cap="flat" cmpd="sng" algn="ctr">
+                      <a:solidFill>
+                        <a:schemeClr val="tx1"/>
+                      </a:solidFill>
+                      <a:prstDash val="solid"/>
+                      <a:round/>
+                      <a:headEnd type="none" w="med" len="med"/>
+                      <a:tailEnd type="none" w="med" len="med"/>
+                    </a:lnT>
+                    <a:lnB w="12700" cap="flat" cmpd="sng" algn="ctr">
+                      <a:solidFill>
+                        <a:schemeClr val="tx1"/>
+                      </a:solidFill>
+                      <a:prstDash val="solid"/>
+                      <a:round/>
+                      <a:headEnd type="none" w="med" len="med"/>
+                      <a:tailEnd type="none" w="med" len="med"/>
+                    </a:lnB>
+                    <a:noFill/>
+                  </a:tcPr>
+                </a:tc>
+                <a:extLst>
+                  <a:ext uri="{0D108BD9-81ED-4DB2-BD59-A6C34878D82A}">
+                    <a16:rowId xmlns:a16="http://schemas.microsoft.com/office/drawing/2014/main" val="979470413"/>
+                  </a:ext>
+                </a:extLst>
+              </a:tr>
+              <a:tr h="947317">
+                <a:tc>
+                  <a:txBody>
+                    <a:bodyPr/>
+                    <a:lstStyle/>
+                    <a:p>
+                      <a:pPr>
+                        <a:buNone/>
+                      </a:pPr>
+                      <a:r>
+                        <a:rPr lang="es-ES" sz="1800"/>
+                        <a:t>Coste de mantenimiento</a:t>
+                      </a:r>
+                    </a:p>
+                  </a:txBody>
+                  <a:tcPr marL="91358" marR="91358" marT="45679" marB="45679" anchor="ctr">
+                    <a:lnL w="12700" cap="flat" cmpd="sng" algn="ctr">
+                      <a:solidFill>
+                        <a:schemeClr val="tx1"/>
+                      </a:solidFill>
+                      <a:prstDash val="solid"/>
+                      <a:round/>
+                      <a:headEnd type="none" w="med" len="med"/>
+                      <a:tailEnd type="none" w="med" len="med"/>
+                    </a:lnL>
+                    <a:lnR w="12700" cap="flat" cmpd="sng" algn="ctr">
+                      <a:solidFill>
+                        <a:schemeClr val="tx1"/>
+                      </a:solidFill>
+                      <a:prstDash val="solid"/>
+                      <a:round/>
+                      <a:headEnd type="none" w="med" len="med"/>
+                      <a:tailEnd type="none" w="med" len="med"/>
+                    </a:lnR>
+                    <a:lnT w="12700" cap="flat" cmpd="sng" algn="ctr">
+                      <a:solidFill>
+                        <a:schemeClr val="tx1"/>
+                      </a:solidFill>
+                      <a:prstDash val="solid"/>
+                      <a:round/>
+                      <a:headEnd type="none" w="med" len="med"/>
+                      <a:tailEnd type="none" w="med" len="med"/>
+                    </a:lnT>
+                    <a:lnB w="12700" cap="flat" cmpd="sng" algn="ctr">
+                      <a:solidFill>
+                        <a:schemeClr val="tx1"/>
+                      </a:solidFill>
+                      <a:prstDash val="solid"/>
+                      <a:round/>
+                      <a:headEnd type="none" w="med" len="med"/>
+                      <a:tailEnd type="none" w="med" len="med"/>
+                    </a:lnB>
+                    <a:noFill/>
+                  </a:tcPr>
+                </a:tc>
+                <a:tc>
+                  <a:txBody>
+                    <a:bodyPr/>
+                    <a:lstStyle/>
+                    <a:p>
+                      <a:pPr>
+                        <a:buNone/>
+                      </a:pPr>
+                      <a:r>
+                        <a:rPr lang="es-ES" sz="1800" dirty="0"/>
+                        <a:t>Escalado progresivo y modular</a:t>
+                      </a:r>
+                    </a:p>
+                  </a:txBody>
+                  <a:tcPr marL="91358" marR="91358" marT="45679" marB="45679" anchor="ctr">
+                    <a:lnL w="12700" cap="flat" cmpd="sng" algn="ctr">
+                      <a:solidFill>
+                        <a:schemeClr val="tx1"/>
+                      </a:solidFill>
+                      <a:prstDash val="solid"/>
+                      <a:round/>
+                      <a:headEnd type="none" w="med" len="med"/>
+                      <a:tailEnd type="none" w="med" len="med"/>
+                    </a:lnL>
+                    <a:lnR w="12700" cap="flat" cmpd="sng" algn="ctr">
+                      <a:solidFill>
+                        <a:schemeClr val="tx1"/>
+                      </a:solidFill>
+                      <a:prstDash val="solid"/>
+                      <a:round/>
+                      <a:headEnd type="none" w="med" len="med"/>
+                      <a:tailEnd type="none" w="med" len="med"/>
+                    </a:lnR>
+                    <a:lnT w="12700" cap="flat" cmpd="sng" algn="ctr">
+                      <a:solidFill>
+                        <a:schemeClr val="tx1"/>
+                      </a:solidFill>
+                      <a:prstDash val="solid"/>
+                      <a:round/>
+                      <a:headEnd type="none" w="med" len="med"/>
+                      <a:tailEnd type="none" w="med" len="med"/>
+                    </a:lnT>
+                    <a:lnB w="12700" cap="flat" cmpd="sng" algn="ctr">
+                      <a:solidFill>
+                        <a:schemeClr val="tx1"/>
+                      </a:solidFill>
+                      <a:prstDash val="solid"/>
+                      <a:round/>
+                      <a:headEnd type="none" w="med" len="med"/>
+                      <a:tailEnd type="none" w="med" len="med"/>
+                    </a:lnB>
+                    <a:noFill/>
+                  </a:tcPr>
+                </a:tc>
+                <a:extLst>
+                  <a:ext uri="{0D108BD9-81ED-4DB2-BD59-A6C34878D82A}">
+                    <a16:rowId xmlns:a16="http://schemas.microsoft.com/office/drawing/2014/main" val="1122911067"/>
+                  </a:ext>
+                </a:extLst>
+              </a:tr>
+            </a:tbl>
+          </a:graphicData>
+        </a:graphic>
+      </p:graphicFrame>
+    </p:spTree>
+    <p:extLst>
+      <p:ext uri="{BB962C8B-B14F-4D97-AF65-F5344CB8AC3E}">
+        <p14:creationId xmlns:p14="http://schemas.microsoft.com/office/powerpoint/2010/main" val="2823598517"/>
+      </p:ext>
+    </p:extLst>
+  </p:cSld>
+  <p:clrMapOvr>
+    <a:masterClrMapping/>
+  </p:clrMapOvr>
+</p:sld>
+</file>
+
+<file path=ppt/slides/slide11.xml><?xml version="1.0" encoding="utf-8"?>
+<p:sld xmlns:a="http://schemas.openxmlformats.org/drawingml/2006/main" xmlns:r="http://schemas.openxmlformats.org/officeDocument/2006/relationships" xmlns:p="http://schemas.openxmlformats.org/presentationml/2006/main">
+  <p:cSld>
+    <p:spTree>
+      <p:nvGrpSpPr>
+        <p:cNvPr id="1" name=""/>
+        <p:cNvGrpSpPr/>
+        <p:nvPr/>
+      </p:nvGrpSpPr>
+      <p:grpSpPr>
+        <a:xfrm>
+          <a:off x="0" y="0"/>
+          <a:ext cx="0" cy="0"/>
+          <a:chOff x="0" y="0"/>
+          <a:chExt cx="0" cy="0"/>
+        </a:xfrm>
+      </p:grpSpPr>
+      <p:sp>
+        <p:nvSpPr>
+          <p:cNvPr id="2" name="Título 1">
+            <a:extLst>
+              <a:ext uri="{FF2B5EF4-FFF2-40B4-BE49-F238E27FC236}">
+                <a16:creationId xmlns:a16="http://schemas.microsoft.com/office/drawing/2014/main" id="{41BEB4F3-56F4-9B79-B9F1-48903F961AAD}"/>
+              </a:ext>
+            </a:extLst>
+          </p:cNvPr>
+          <p:cNvSpPr>
+            <a:spLocks noGrp="1"/>
+          </p:cNvSpPr>
+          <p:nvPr>
+            <p:ph type="title"/>
+          </p:nvPr>
+        </p:nvSpPr>
+        <p:spPr/>
+        <p:txBody>
+          <a:bodyPr/>
+          <a:lstStyle/>
+          <a:p>
+            <a:r>
+              <a:rPr lang="es-ES" dirty="0"/>
+              <a:t>Indicadores de Éxito</a:t>
+            </a:r>
+          </a:p>
+        </p:txBody>
+      </p:sp>
+      <p:sp>
+        <p:nvSpPr>
+          <p:cNvPr id="3" name="Marcador de contenido 2">
+            <a:extLst>
+              <a:ext uri="{FF2B5EF4-FFF2-40B4-BE49-F238E27FC236}">
+                <a16:creationId xmlns:a16="http://schemas.microsoft.com/office/drawing/2014/main" id="{90BEA90B-5D93-276C-A86A-126F78A8EA61}"/>
+              </a:ext>
+            </a:extLst>
+          </p:cNvPr>
+          <p:cNvSpPr>
+            <a:spLocks noGrp="1"/>
+          </p:cNvSpPr>
+          <p:nvPr>
+            <p:ph idx="1"/>
+          </p:nvPr>
+        </p:nvSpPr>
+        <p:spPr/>
+        <p:txBody>
+          <a:bodyPr/>
+          <a:lstStyle/>
+          <a:p>
+            <a:r>
+              <a:rPr lang="es-ES" dirty="0"/>
+              <a:t>% de reservas realizadas vía app</a:t>
+            </a:r>
+          </a:p>
+          <a:p>
+            <a:r>
+              <a:rPr lang="es-ES" dirty="0"/>
+              <a:t>Reducción de llamadas/mensajes al club</a:t>
+            </a:r>
+          </a:p>
+          <a:p>
+            <a:r>
+              <a:rPr lang="es-ES" dirty="0"/>
+              <a:t>Participación en torneos y eventos</a:t>
+            </a:r>
+          </a:p>
+          <a:p>
+            <a:r>
+              <a:rPr lang="es-ES" dirty="0"/>
+              <a:t>Valoración media de usuarios</a:t>
+            </a:r>
+          </a:p>
+          <a:p>
+            <a:r>
+              <a:rPr lang="es-ES" dirty="0"/>
+              <a:t>Tiempo medio de respuesta del sistema</a:t>
+            </a:r>
+          </a:p>
+        </p:txBody>
+      </p:sp>
+    </p:spTree>
+    <p:extLst>
+      <p:ext uri="{BB962C8B-B14F-4D97-AF65-F5344CB8AC3E}">
+        <p14:creationId xmlns:p14="http://schemas.microsoft.com/office/powerpoint/2010/main" val="407811187"/>
+      </p:ext>
+    </p:extLst>
+  </p:cSld>
+  <p:clrMapOvr>
+    <a:masterClrMapping/>
+  </p:clrMapOvr>
+</p:sld>
+</file>
+
+<file path=ppt/slides/slide12.xml><?xml version="1.0" encoding="utf-8"?>
+<p:sld xmlns:a="http://schemas.openxmlformats.org/drawingml/2006/main" xmlns:r="http://schemas.openxmlformats.org/officeDocument/2006/relationships" xmlns:p="http://schemas.openxmlformats.org/presentationml/2006/main">
+  <p:cSld>
+    <p:spTree>
+      <p:nvGrpSpPr>
+        <p:cNvPr id="1" name=""/>
+        <p:cNvGrpSpPr/>
+        <p:nvPr/>
+      </p:nvGrpSpPr>
+      <p:grpSpPr>
+        <a:xfrm>
+          <a:off x="0" y="0"/>
+          <a:ext cx="0" cy="0"/>
+          <a:chOff x="0" y="0"/>
+          <a:chExt cx="0" cy="0"/>
+        </a:xfrm>
+      </p:grpSpPr>
+      <p:sp>
+        <p:nvSpPr>
+          <p:cNvPr id="2" name="Título 1">
+            <a:extLst>
+              <a:ext uri="{FF2B5EF4-FFF2-40B4-BE49-F238E27FC236}">
+                <a16:creationId xmlns:a16="http://schemas.microsoft.com/office/drawing/2014/main" id="{DA6CA7C0-7CB1-E6B9-82CB-0156C158B57C}"/>
+              </a:ext>
+            </a:extLst>
+          </p:cNvPr>
+          <p:cNvSpPr>
+            <a:spLocks noGrp="1"/>
+          </p:cNvSpPr>
+          <p:nvPr>
+            <p:ph type="title"/>
+          </p:nvPr>
+        </p:nvSpPr>
+        <p:spPr/>
+        <p:txBody>
+          <a:bodyPr/>
+          <a:lstStyle/>
+          <a:p>
+            <a:r>
+              <a:rPr lang="es-ES" dirty="0"/>
+              <a:t>Arquitectura Técnica</a:t>
+            </a:r>
+          </a:p>
+        </p:txBody>
+      </p:sp>
+      <p:sp>
+        <p:nvSpPr>
+          <p:cNvPr id="3" name="Marcador de contenido 2">
+            <a:extLst>
+              <a:ext uri="{FF2B5EF4-FFF2-40B4-BE49-F238E27FC236}">
+                <a16:creationId xmlns:a16="http://schemas.microsoft.com/office/drawing/2014/main" id="{D04EA5E7-0D58-662C-6057-20BC818D8318}"/>
+              </a:ext>
+            </a:extLst>
+          </p:cNvPr>
+          <p:cNvSpPr>
+            <a:spLocks noGrp="1"/>
+          </p:cNvSpPr>
+          <p:nvPr>
+            <p:ph idx="1"/>
+          </p:nvPr>
+        </p:nvSpPr>
+        <p:spPr/>
+        <p:txBody>
+          <a:bodyPr/>
+          <a:lstStyle/>
+          <a:p>
+            <a:r>
+              <a:rPr lang="es-ES" dirty="0" err="1"/>
+              <a:t>Frontend</a:t>
+            </a:r>
+            <a:r>
+              <a:rPr lang="es-ES" dirty="0"/>
+              <a:t>: Android (</a:t>
+            </a:r>
+            <a:r>
+              <a:rPr lang="es-ES" dirty="0" err="1"/>
+              <a:t>Kotlin</a:t>
+            </a:r>
+            <a:r>
+              <a:rPr lang="es-ES" dirty="0"/>
+              <a:t>) + Web (HTML/CSS/JS)</a:t>
+            </a:r>
+          </a:p>
+          <a:p>
+            <a:r>
+              <a:rPr lang="es-ES" dirty="0" err="1"/>
+              <a:t>Backend</a:t>
+            </a:r>
+            <a:r>
+              <a:rPr lang="es-ES" dirty="0"/>
+              <a:t>: Uso de API REST </a:t>
+            </a:r>
+          </a:p>
+          <a:p>
+            <a:r>
+              <a:rPr lang="es-ES" dirty="0"/>
+              <a:t>Base de datos: MySQL</a:t>
+            </a:r>
+          </a:p>
+          <a:p>
+            <a:r>
+              <a:rPr lang="es-ES" dirty="0"/>
+              <a:t>Seguridad: Cifrado de contraseña del usuario con caching_sha2_password(En base de datos) </a:t>
+            </a:r>
+          </a:p>
+        </p:txBody>
+      </p:sp>
+    </p:spTree>
+    <p:extLst>
+      <p:ext uri="{BB962C8B-B14F-4D97-AF65-F5344CB8AC3E}">
+        <p14:creationId xmlns:p14="http://schemas.microsoft.com/office/powerpoint/2010/main" val="3060059104"/>
       </p:ext>
     </p:extLst>
   </p:cSld>
@@ -5495,7 +6625,7 @@
           <p:cNvPr id="2" name="Título 1">
             <a:extLst>
               <a:ext uri="{FF2B5EF4-FFF2-40B4-BE49-F238E27FC236}">
-                <a16:creationId xmlns:a16="http://schemas.microsoft.com/office/drawing/2014/main" id="{2317448A-65CC-F782-789A-722EC5E177F1}"/>
+                <a16:creationId xmlns:a16="http://schemas.microsoft.com/office/drawing/2014/main" id="{55A47B68-CAAB-FAC4-68F6-BCCDE998C522}"/>
               </a:ext>
             </a:extLst>
           </p:cNvPr>
@@ -5512,89 +6642,628 @@
           <a:lstStyle/>
           <a:p>
             <a:r>
-              <a:rPr lang="es-ES" dirty="0"/>
-              <a:t>Problema del mercado</a:t>
-            </a:r>
-          </a:p>
-        </p:txBody>
-      </p:sp>
-      <p:sp>
-        <p:nvSpPr>
-          <p:cNvPr id="3" name="Marcador de contenido 2">
-            <a:extLst>
-              <a:ext uri="{FF2B5EF4-FFF2-40B4-BE49-F238E27FC236}">
-                <a16:creationId xmlns:a16="http://schemas.microsoft.com/office/drawing/2014/main" id="{3CDABB05-EE6F-B384-1922-78F75533B8D1}"/>
-              </a:ext>
-            </a:extLst>
-          </p:cNvPr>
-          <p:cNvSpPr>
-            <a:spLocks noGrp="1"/>
-          </p:cNvSpPr>
-          <p:nvPr>
-            <p:ph idx="1"/>
-          </p:nvPr>
-        </p:nvSpPr>
-        <p:spPr/>
-        <p:txBody>
-          <a:bodyPr/>
-          <a:lstStyle/>
-          <a:p>
-            <a:pPr marL="0" indent="0">
-              <a:buNone/>
-            </a:pPr>
-            <a:r>
-              <a:rPr lang="es-ES" dirty="0"/>
-              <a:t>Empresa de pádel busca:</a:t>
-            </a:r>
-          </a:p>
-          <a:p>
-            <a:pPr>
-              <a:buFont typeface="Courier New" panose="02070309020205020404" pitchFamily="49" charset="0"/>
-              <a:buChar char="o"/>
-            </a:pPr>
-            <a:r>
-              <a:rPr lang="es-ES" dirty="0"/>
-              <a:t>Aumentar la productividad y mejorar su huella ecológica pasando de la gestión de usuarios y reservas de forma analógica (papel y archivadores) a gestión web y vía APP</a:t>
-            </a:r>
-          </a:p>
-          <a:p>
-            <a:pPr>
-              <a:buFont typeface="Courier New" panose="02070309020205020404" pitchFamily="49" charset="0"/>
-              <a:buChar char="o"/>
-            </a:pPr>
-            <a:r>
-              <a:rPr lang="es-ES" dirty="0"/>
-              <a:t>Romper la brecha tecnológica respecto a sus principales competidores que ya usan una forma mas moderna e informatizada de gestión de sus recursos</a:t>
-            </a:r>
-          </a:p>
-          <a:p>
-            <a:pPr>
-              <a:buFont typeface="Courier New" panose="02070309020205020404" pitchFamily="49" charset="0"/>
-              <a:buChar char="o"/>
-            </a:pPr>
-            <a:r>
-              <a:rPr lang="es-ES" dirty="0"/>
-              <a:t>Facilitar la escalabilidad de implementación de nuevas pistas y usuarios ya sea usuarios nuevos o ya existentes</a:t>
-            </a:r>
-          </a:p>
-          <a:p>
-            <a:pPr marL="0" indent="0">
-              <a:buNone/>
-            </a:pPr>
+              <a:rPr lang="es-ES" dirty="0" err="1"/>
+              <a:t>Indice</a:t>
+            </a:r>
             <a:endParaRPr lang="es-ES" dirty="0"/>
           </a:p>
-          <a:p>
-            <a:pPr marL="0" indent="0">
-              <a:buNone/>
-            </a:pPr>
-            <a:endParaRPr lang="es-ES" dirty="0"/>
-          </a:p>
-        </p:txBody>
-      </p:sp>
+        </p:txBody>
+      </p:sp>
+      <mc:AlternateContent xmlns:mc="http://schemas.openxmlformats.org/markup-compatibility/2006">
+        <mc:Choice xmlns:psuz="http://schemas.microsoft.com/office/powerpoint/2016/summaryzoom" Requires="psuz">
+          <p:graphicFrame>
+            <p:nvGraphicFramePr>
+              <p:cNvPr id="5" name="Vista general de resumen 4">
+                <a:extLst>
+                  <a:ext uri="{FF2B5EF4-FFF2-40B4-BE49-F238E27FC236}">
+                    <a16:creationId xmlns:a16="http://schemas.microsoft.com/office/drawing/2014/main" id="{2AF21F3C-6FE5-66B6-608A-458728E517A3}"/>
+                  </a:ext>
+                </a:extLst>
+              </p:cNvPr>
+              <p:cNvGraphicFramePr>
+                <a:graphicFrameLocks noChangeAspect="1"/>
+              </p:cNvGraphicFramePr>
+              <p:nvPr>
+                <p:extLst>
+                  <p:ext uri="{D42A27DB-BD31-4B8C-83A1-F6EECF244321}">
+                    <p14:modId xmlns:p14="http://schemas.microsoft.com/office/powerpoint/2010/main" val="1450835865"/>
+                  </p:ext>
+                </p:extLst>
+              </p:nvPr>
+            </p:nvGraphicFramePr>
+            <p:xfrm>
+              <a:off x="819150" y="2222500"/>
+              <a:ext cx="10553700" cy="3636963"/>
+            </p:xfrm>
+            <a:graphic>
+              <a:graphicData uri="http://schemas.microsoft.com/office/powerpoint/2016/summaryzoom">
+                <psuz:summaryZm>
+                  <psuz:summaryZmObj sectionId="{1E3C7999-4C75-469F-9E2C-944799BB1ED1}">
+                    <psuz:zmPr id="{970D622B-928D-4EA4-B965-002CB0F7C433}" transitionDur="1000">
+                      <p166:blipFill xmlns:p166="http://schemas.microsoft.com/office/powerpoint/2016/6/main">
+                        <a:blip r:embed="rId2"/>
+                        <a:stretch>
+                          <a:fillRect/>
+                        </a:stretch>
+                      </p166:blipFill>
+                      <p166:spPr xmlns:p166="http://schemas.microsoft.com/office/powerpoint/2016/6/main">
+                        <a:xfrm>
+                          <a:off x="1288315" y="109109"/>
+                          <a:ext cx="1939713" cy="1091089"/>
+                        </a:xfrm>
+                        <a:prstGeom prst="rect">
+                          <a:avLst/>
+                        </a:prstGeom>
+                        <a:ln w="3175">
+                          <a:solidFill>
+                            <a:prstClr val="ltGray"/>
+                          </a:solidFill>
+                        </a:ln>
+                      </p166:spPr>
+                    </psuz:zmPr>
+                  </psuz:summaryZmObj>
+                  <psuz:summaryZmObj sectionId="{4CEFEB3D-A5F0-43F7-A338-07B768455403}">
+                    <psuz:zmPr id="{D15B387A-CA39-4BCE-8D6D-901CC3018A50}" transitionDur="1000">
+                      <p166:blipFill xmlns:p166="http://schemas.microsoft.com/office/powerpoint/2016/6/main">
+                        <a:blip r:embed="rId3"/>
+                        <a:stretch>
+                          <a:fillRect/>
+                        </a:stretch>
+                      </p166:blipFill>
+                      <p166:spPr xmlns:p166="http://schemas.microsoft.com/office/powerpoint/2016/6/main">
+                        <a:xfrm>
+                          <a:off x="3300767" y="109109"/>
+                          <a:ext cx="1939713" cy="1091089"/>
+                        </a:xfrm>
+                        <a:prstGeom prst="rect">
+                          <a:avLst/>
+                        </a:prstGeom>
+                        <a:ln w="3175">
+                          <a:solidFill>
+                            <a:prstClr val="ltGray"/>
+                          </a:solidFill>
+                        </a:ln>
+                      </p166:spPr>
+                    </psuz:zmPr>
+                  </psuz:summaryZmObj>
+                  <psuz:summaryZmObj sectionId="{908F0865-14C1-4D7F-BF09-B3B3BD18A723}">
+                    <psuz:zmPr id="{27334D85-F6DB-4EE4-8D22-707F42B85FA1}" transitionDur="1000">
+                      <p166:blipFill xmlns:p166="http://schemas.microsoft.com/office/powerpoint/2016/6/main">
+                        <a:blip r:embed="rId4"/>
+                        <a:stretch>
+                          <a:fillRect/>
+                        </a:stretch>
+                      </p166:blipFill>
+                      <p166:spPr xmlns:p166="http://schemas.microsoft.com/office/powerpoint/2016/6/main">
+                        <a:xfrm>
+                          <a:off x="5313219" y="109109"/>
+                          <a:ext cx="1939713" cy="1091089"/>
+                        </a:xfrm>
+                        <a:prstGeom prst="rect">
+                          <a:avLst/>
+                        </a:prstGeom>
+                        <a:ln w="3175">
+                          <a:solidFill>
+                            <a:prstClr val="ltGray"/>
+                          </a:solidFill>
+                        </a:ln>
+                      </p166:spPr>
+                    </psuz:zmPr>
+                  </psuz:summaryZmObj>
+                  <psuz:summaryZmObj sectionId="{C8238934-1115-4909-BA08-5C101B6AF4D7}">
+                    <psuz:zmPr id="{751D156F-19E9-4E77-818F-E04FC1286299}" transitionDur="1000">
+                      <p166:blipFill xmlns:p166="http://schemas.microsoft.com/office/powerpoint/2016/6/main">
+                        <a:blip r:embed="rId5"/>
+                        <a:stretch>
+                          <a:fillRect/>
+                        </a:stretch>
+                      </p166:blipFill>
+                      <p166:spPr xmlns:p166="http://schemas.microsoft.com/office/powerpoint/2016/6/main">
+                        <a:xfrm>
+                          <a:off x="7325671" y="109109"/>
+                          <a:ext cx="1939713" cy="1091089"/>
+                        </a:xfrm>
+                        <a:prstGeom prst="rect">
+                          <a:avLst/>
+                        </a:prstGeom>
+                        <a:ln w="3175">
+                          <a:solidFill>
+                            <a:prstClr val="ltGray"/>
+                          </a:solidFill>
+                        </a:ln>
+                      </p166:spPr>
+                    </psuz:zmPr>
+                  </psuz:summaryZmObj>
+                  <psuz:summaryZmObj sectionId="{8BFEE87D-8D43-40D5-B808-5CAD0D815AED}">
+                    <psuz:zmPr id="{F6CAA9B9-67EE-41F6-820C-749B8EC61851}" transitionDur="1000">
+                      <p166:blipFill xmlns:p166="http://schemas.microsoft.com/office/powerpoint/2016/6/main">
+                        <a:blip r:embed="rId6"/>
+                        <a:stretch>
+                          <a:fillRect/>
+                        </a:stretch>
+                      </p166:blipFill>
+                      <p166:spPr xmlns:p166="http://schemas.microsoft.com/office/powerpoint/2016/6/main">
+                        <a:xfrm>
+                          <a:off x="1288315" y="1272937"/>
+                          <a:ext cx="1939713" cy="1091089"/>
+                        </a:xfrm>
+                        <a:prstGeom prst="rect">
+                          <a:avLst/>
+                        </a:prstGeom>
+                        <a:ln w="3175">
+                          <a:solidFill>
+                            <a:prstClr val="ltGray"/>
+                          </a:solidFill>
+                        </a:ln>
+                      </p166:spPr>
+                    </psuz:zmPr>
+                  </psuz:summaryZmObj>
+                  <psuz:summaryZmObj sectionId="{24139C22-E19D-403C-98AB-001BA44E1610}">
+                    <psuz:zmPr id="{D6DD9996-0FAB-4D7A-8922-9C557D362933}" transitionDur="1000">
+                      <p166:blipFill xmlns:p166="http://schemas.microsoft.com/office/powerpoint/2016/6/main">
+                        <a:blip r:embed="rId7"/>
+                        <a:stretch>
+                          <a:fillRect/>
+                        </a:stretch>
+                      </p166:blipFill>
+                      <p166:spPr xmlns:p166="http://schemas.microsoft.com/office/powerpoint/2016/6/main">
+                        <a:xfrm>
+                          <a:off x="3300767" y="1272937"/>
+                          <a:ext cx="1939713" cy="1091089"/>
+                        </a:xfrm>
+                        <a:prstGeom prst="rect">
+                          <a:avLst/>
+                        </a:prstGeom>
+                        <a:ln w="3175">
+                          <a:solidFill>
+                            <a:prstClr val="ltGray"/>
+                          </a:solidFill>
+                        </a:ln>
+                      </p166:spPr>
+                    </psuz:zmPr>
+                  </psuz:summaryZmObj>
+                  <psuz:summaryZmObj sectionId="{ACC6F00E-F84F-46FB-A41B-A495D697A415}">
+                    <psuz:zmPr id="{D6BC31DE-CBCC-4E52-A71B-6CF17048D571}" transitionDur="1000">
+                      <p166:blipFill xmlns:p166="http://schemas.microsoft.com/office/powerpoint/2016/6/main">
+                        <a:blip r:embed="rId8"/>
+                        <a:stretch>
+                          <a:fillRect/>
+                        </a:stretch>
+                      </p166:blipFill>
+                      <p166:spPr xmlns:p166="http://schemas.microsoft.com/office/powerpoint/2016/6/main">
+                        <a:xfrm>
+                          <a:off x="5313219" y="1272937"/>
+                          <a:ext cx="1939713" cy="1091089"/>
+                        </a:xfrm>
+                        <a:prstGeom prst="rect">
+                          <a:avLst/>
+                        </a:prstGeom>
+                        <a:ln w="3175">
+                          <a:solidFill>
+                            <a:prstClr val="ltGray"/>
+                          </a:solidFill>
+                        </a:ln>
+                      </p166:spPr>
+                    </psuz:zmPr>
+                  </psuz:summaryZmObj>
+                  <psuz:summaryZmObj sectionId="{5C7A9DF9-09E6-4748-9368-A0249E6A317F}">
+                    <psuz:zmPr id="{B4B38409-03A9-4484-A0F6-CC83D2A26065}" transitionDur="1000">
+                      <p166:blipFill xmlns:p166="http://schemas.microsoft.com/office/powerpoint/2016/6/main">
+                        <a:blip r:embed="rId9"/>
+                        <a:stretch>
+                          <a:fillRect/>
+                        </a:stretch>
+                      </p166:blipFill>
+                      <p166:spPr xmlns:p166="http://schemas.microsoft.com/office/powerpoint/2016/6/main">
+                        <a:xfrm>
+                          <a:off x="7325671" y="1272937"/>
+                          <a:ext cx="1939713" cy="1091089"/>
+                        </a:xfrm>
+                        <a:prstGeom prst="rect">
+                          <a:avLst/>
+                        </a:prstGeom>
+                        <a:ln w="3175">
+                          <a:solidFill>
+                            <a:prstClr val="ltGray"/>
+                          </a:solidFill>
+                        </a:ln>
+                      </p166:spPr>
+                    </psuz:zmPr>
+                  </psuz:summaryZmObj>
+                  <psuz:summaryZmObj sectionId="{6A63F25A-FD89-48BF-99DF-3C5C11418BEE}">
+                    <psuz:zmPr id="{77F32ADE-D7BB-4E7F-9C1D-E2929494C655}" transitionDur="1000">
+                      <p166:blipFill xmlns:p166="http://schemas.microsoft.com/office/powerpoint/2016/6/main">
+                        <a:blip r:embed="rId10"/>
+                        <a:stretch>
+                          <a:fillRect/>
+                        </a:stretch>
+                      </p166:blipFill>
+                      <p166:spPr xmlns:p166="http://schemas.microsoft.com/office/powerpoint/2016/6/main">
+                        <a:xfrm>
+                          <a:off x="1288315" y="2436765"/>
+                          <a:ext cx="1939713" cy="1091089"/>
+                        </a:xfrm>
+                        <a:prstGeom prst="rect">
+                          <a:avLst/>
+                        </a:prstGeom>
+                        <a:ln w="3175">
+                          <a:solidFill>
+                            <a:prstClr val="ltGray"/>
+                          </a:solidFill>
+                        </a:ln>
+                      </p166:spPr>
+                    </psuz:zmPr>
+                  </psuz:summaryZmObj>
+                  <psuz:summaryZmObj sectionId="{FD2B0B56-932A-42D8-A918-2F86CFF44B38}">
+                    <psuz:zmPr id="{C657EDAC-E960-491A-A447-E268523E2966}" transitionDur="1000">
+                      <p166:blipFill xmlns:p166="http://schemas.microsoft.com/office/powerpoint/2016/6/main">
+                        <a:blip r:embed="rId11"/>
+                        <a:stretch>
+                          <a:fillRect/>
+                        </a:stretch>
+                      </p166:blipFill>
+                      <p166:spPr xmlns:p166="http://schemas.microsoft.com/office/powerpoint/2016/6/main">
+                        <a:xfrm>
+                          <a:off x="3300767" y="2436765"/>
+                          <a:ext cx="1939713" cy="1091089"/>
+                        </a:xfrm>
+                        <a:prstGeom prst="rect">
+                          <a:avLst/>
+                        </a:prstGeom>
+                        <a:ln w="3175">
+                          <a:solidFill>
+                            <a:prstClr val="ltGray"/>
+                          </a:solidFill>
+                        </a:ln>
+                      </p166:spPr>
+                    </psuz:zmPr>
+                  </psuz:summaryZmObj>
+                  <psuz:gridLayout/>
+                </psuz:summaryZm>
+              </a:graphicData>
+            </a:graphic>
+          </p:graphicFrame>
+        </mc:Choice>
+        <mc:Fallback>
+          <p:grpSp>
+            <p:nvGrpSpPr>
+              <p:cNvPr id="5" name="Vista general de resumen 4">
+                <a:extLst>
+                  <a:ext uri="{FF2B5EF4-FFF2-40B4-BE49-F238E27FC236}">
+                    <a16:creationId xmlns:a16="http://schemas.microsoft.com/office/drawing/2014/main" id="{2AF21F3C-6FE5-66B6-608A-458728E517A3}"/>
+                  </a:ext>
+                </a:extLst>
+              </p:cNvPr>
+              <p:cNvGrpSpPr>
+                <a:grpSpLocks noGrp="1" noUngrp="1" noRot="1" noChangeAspect="1" noMove="1" noResize="1"/>
+              </p:cNvGrpSpPr>
+              <p:nvPr/>
+            </p:nvGrpSpPr>
+            <p:grpSpPr>
+              <a:xfrm>
+                <a:off x="819150" y="2222500"/>
+                <a:ext cx="10553700" cy="3636963"/>
+                <a:chOff x="819150" y="2222500"/>
+                <a:chExt cx="10553700" cy="3636963"/>
+              </a:xfrm>
+            </p:grpSpPr>
+            <p:pic>
+              <p:nvPicPr>
+                <p:cNvPr id="6" name="Imagen 6">
+                  <a:hlinkClick r:id="rId12" action="ppaction://hlinksldjump"/>
+                </p:cNvPr>
+                <p:cNvPicPr>
+                  <a:picLocks noSelect="1" noRot="1" noChangeAspect="1" noMove="1" noResize="1" noEditPoints="1" noAdjustHandles="1" noChangeArrowheads="1" noChangeShapeType="1"/>
+                </p:cNvPicPr>
+                <p:nvPr/>
+              </p:nvPicPr>
+              <p:blipFill>
+                <a:blip r:embed="rId2"/>
+                <a:stretch>
+                  <a:fillRect/>
+                </a:stretch>
+              </p:blipFill>
+              <p:spPr>
+                <a:xfrm>
+                  <a:off x="2107465" y="2331609"/>
+                  <a:ext cx="1939713" cy="1091089"/>
+                </a:xfrm>
+                <a:prstGeom prst="rect">
+                  <a:avLst/>
+                </a:prstGeom>
+                <a:ln w="3175">
+                  <a:solidFill>
+                    <a:prstClr val="ltGray"/>
+                  </a:solidFill>
+                </a:ln>
+              </p:spPr>
+            </p:pic>
+            <p:pic>
+              <p:nvPicPr>
+                <p:cNvPr id="7" name="Imagen 7">
+                  <a:hlinkClick r:id="rId13" action="ppaction://hlinksldjump"/>
+                </p:cNvPr>
+                <p:cNvPicPr>
+                  <a:picLocks noSelect="1" noRot="1" noChangeAspect="1" noMove="1" noResize="1" noEditPoints="1" noAdjustHandles="1" noChangeArrowheads="1" noChangeShapeType="1"/>
+                </p:cNvPicPr>
+                <p:nvPr/>
+              </p:nvPicPr>
+              <p:blipFill>
+                <a:blip r:embed="rId3"/>
+                <a:stretch>
+                  <a:fillRect/>
+                </a:stretch>
+              </p:blipFill>
+              <p:spPr>
+                <a:xfrm>
+                  <a:off x="4119917" y="2331609"/>
+                  <a:ext cx="1939713" cy="1091089"/>
+                </a:xfrm>
+                <a:prstGeom prst="rect">
+                  <a:avLst/>
+                </a:prstGeom>
+                <a:ln w="3175">
+                  <a:solidFill>
+                    <a:prstClr val="ltGray"/>
+                  </a:solidFill>
+                </a:ln>
+              </p:spPr>
+            </p:pic>
+            <p:pic>
+              <p:nvPicPr>
+                <p:cNvPr id="8" name="Imagen 8">
+                  <a:hlinkClick r:id="rId14" action="ppaction://hlinksldjump"/>
+                </p:cNvPr>
+                <p:cNvPicPr>
+                  <a:picLocks noSelect="1" noRot="1" noChangeAspect="1" noMove="1" noResize="1" noEditPoints="1" noAdjustHandles="1" noChangeArrowheads="1" noChangeShapeType="1"/>
+                </p:cNvPicPr>
+                <p:nvPr/>
+              </p:nvPicPr>
+              <p:blipFill>
+                <a:blip r:embed="rId4"/>
+                <a:stretch>
+                  <a:fillRect/>
+                </a:stretch>
+              </p:blipFill>
+              <p:spPr>
+                <a:xfrm>
+                  <a:off x="6132369" y="2331609"/>
+                  <a:ext cx="1939713" cy="1091089"/>
+                </a:xfrm>
+                <a:prstGeom prst="rect">
+                  <a:avLst/>
+                </a:prstGeom>
+                <a:ln w="3175">
+                  <a:solidFill>
+                    <a:prstClr val="ltGray"/>
+                  </a:solidFill>
+                </a:ln>
+              </p:spPr>
+            </p:pic>
+            <p:pic>
+              <p:nvPicPr>
+                <p:cNvPr id="9" name="Imagen 9">
+                  <a:hlinkClick r:id="rId15" action="ppaction://hlinksldjump"/>
+                </p:cNvPr>
+                <p:cNvPicPr>
+                  <a:picLocks noSelect="1" noRot="1" noChangeAspect="1" noMove="1" noResize="1" noEditPoints="1" noAdjustHandles="1" noChangeArrowheads="1" noChangeShapeType="1"/>
+                </p:cNvPicPr>
+                <p:nvPr/>
+              </p:nvPicPr>
+              <p:blipFill>
+                <a:blip r:embed="rId5"/>
+                <a:stretch>
+                  <a:fillRect/>
+                </a:stretch>
+              </p:blipFill>
+              <p:spPr>
+                <a:xfrm>
+                  <a:off x="8144821" y="2331609"/>
+                  <a:ext cx="1939713" cy="1091089"/>
+                </a:xfrm>
+                <a:prstGeom prst="rect">
+                  <a:avLst/>
+                </a:prstGeom>
+                <a:ln w="3175">
+                  <a:solidFill>
+                    <a:prstClr val="ltGray"/>
+                  </a:solidFill>
+                </a:ln>
+              </p:spPr>
+            </p:pic>
+            <p:pic>
+              <p:nvPicPr>
+                <p:cNvPr id="10" name="Imagen 10">
+                  <a:hlinkClick r:id="rId16" action="ppaction://hlinksldjump"/>
+                </p:cNvPr>
+                <p:cNvPicPr>
+                  <a:picLocks noSelect="1" noRot="1" noChangeAspect="1" noMove="1" noResize="1" noEditPoints="1" noAdjustHandles="1" noChangeArrowheads="1" noChangeShapeType="1"/>
+                </p:cNvPicPr>
+                <p:nvPr/>
+              </p:nvPicPr>
+              <p:blipFill>
+                <a:blip r:embed="rId6"/>
+                <a:stretch>
+                  <a:fillRect/>
+                </a:stretch>
+              </p:blipFill>
+              <p:spPr>
+                <a:xfrm>
+                  <a:off x="2107465" y="3495437"/>
+                  <a:ext cx="1939713" cy="1091089"/>
+                </a:xfrm>
+                <a:prstGeom prst="rect">
+                  <a:avLst/>
+                </a:prstGeom>
+                <a:ln w="3175">
+                  <a:solidFill>
+                    <a:prstClr val="ltGray"/>
+                  </a:solidFill>
+                </a:ln>
+              </p:spPr>
+            </p:pic>
+            <p:pic>
+              <p:nvPicPr>
+                <p:cNvPr id="11" name="Imagen 11">
+                  <a:hlinkClick r:id="rId17" action="ppaction://hlinksldjump"/>
+                </p:cNvPr>
+                <p:cNvPicPr>
+                  <a:picLocks noSelect="1" noRot="1" noChangeAspect="1" noMove="1" noResize="1" noEditPoints="1" noAdjustHandles="1" noChangeArrowheads="1" noChangeShapeType="1"/>
+                </p:cNvPicPr>
+                <p:nvPr/>
+              </p:nvPicPr>
+              <p:blipFill>
+                <a:blip r:embed="rId7"/>
+                <a:stretch>
+                  <a:fillRect/>
+                </a:stretch>
+              </p:blipFill>
+              <p:spPr>
+                <a:xfrm>
+                  <a:off x="4119917" y="3495437"/>
+                  <a:ext cx="1939713" cy="1091089"/>
+                </a:xfrm>
+                <a:prstGeom prst="rect">
+                  <a:avLst/>
+                </a:prstGeom>
+                <a:ln w="3175">
+                  <a:solidFill>
+                    <a:prstClr val="ltGray"/>
+                  </a:solidFill>
+                </a:ln>
+              </p:spPr>
+            </p:pic>
+            <p:pic>
+              <p:nvPicPr>
+                <p:cNvPr id="12" name="Imagen 12">
+                  <a:hlinkClick r:id="rId18" action="ppaction://hlinksldjump"/>
+                </p:cNvPr>
+                <p:cNvPicPr>
+                  <a:picLocks noSelect="1" noRot="1" noChangeAspect="1" noMove="1" noResize="1" noEditPoints="1" noAdjustHandles="1" noChangeArrowheads="1" noChangeShapeType="1"/>
+                </p:cNvPicPr>
+                <p:nvPr/>
+              </p:nvPicPr>
+              <p:blipFill>
+                <a:blip r:embed="rId8"/>
+                <a:stretch>
+                  <a:fillRect/>
+                </a:stretch>
+              </p:blipFill>
+              <p:spPr>
+                <a:xfrm>
+                  <a:off x="6132369" y="3495437"/>
+                  <a:ext cx="1939713" cy="1091089"/>
+                </a:xfrm>
+                <a:prstGeom prst="rect">
+                  <a:avLst/>
+                </a:prstGeom>
+                <a:ln w="3175">
+                  <a:solidFill>
+                    <a:prstClr val="ltGray"/>
+                  </a:solidFill>
+                </a:ln>
+              </p:spPr>
+            </p:pic>
+            <p:pic>
+              <p:nvPicPr>
+                <p:cNvPr id="13" name="Imagen 13">
+                  <a:hlinkClick r:id="rId19" action="ppaction://hlinksldjump"/>
+                </p:cNvPr>
+                <p:cNvPicPr>
+                  <a:picLocks noSelect="1" noRot="1" noChangeAspect="1" noMove="1" noResize="1" noEditPoints="1" noAdjustHandles="1" noChangeArrowheads="1" noChangeShapeType="1"/>
+                </p:cNvPicPr>
+                <p:nvPr/>
+              </p:nvPicPr>
+              <p:blipFill>
+                <a:blip r:embed="rId9"/>
+                <a:stretch>
+                  <a:fillRect/>
+                </a:stretch>
+              </p:blipFill>
+              <p:spPr>
+                <a:xfrm>
+                  <a:off x="8144821" y="3495437"/>
+                  <a:ext cx="1939713" cy="1091089"/>
+                </a:xfrm>
+                <a:prstGeom prst="rect">
+                  <a:avLst/>
+                </a:prstGeom>
+                <a:ln w="3175">
+                  <a:solidFill>
+                    <a:prstClr val="ltGray"/>
+                  </a:solidFill>
+                </a:ln>
+              </p:spPr>
+            </p:pic>
+            <p:pic>
+              <p:nvPicPr>
+                <p:cNvPr id="14" name="Imagen 14">
+                  <a:hlinkClick r:id="rId20" action="ppaction://hlinksldjump"/>
+                </p:cNvPr>
+                <p:cNvPicPr>
+                  <a:picLocks noSelect="1" noRot="1" noChangeAspect="1" noMove="1" noResize="1" noEditPoints="1" noAdjustHandles="1" noChangeArrowheads="1" noChangeShapeType="1"/>
+                </p:cNvPicPr>
+                <p:nvPr/>
+              </p:nvPicPr>
+              <p:blipFill>
+                <a:blip r:embed="rId10"/>
+                <a:stretch>
+                  <a:fillRect/>
+                </a:stretch>
+              </p:blipFill>
+              <p:spPr>
+                <a:xfrm>
+                  <a:off x="2107465" y="4659265"/>
+                  <a:ext cx="1939713" cy="1091089"/>
+                </a:xfrm>
+                <a:prstGeom prst="rect">
+                  <a:avLst/>
+                </a:prstGeom>
+                <a:ln w="3175">
+                  <a:solidFill>
+                    <a:prstClr val="ltGray"/>
+                  </a:solidFill>
+                </a:ln>
+              </p:spPr>
+            </p:pic>
+            <p:pic>
+              <p:nvPicPr>
+                <p:cNvPr id="15" name="Imagen 15">
+                  <a:hlinkClick r:id="rId21" action="ppaction://hlinksldjump"/>
+                </p:cNvPr>
+                <p:cNvPicPr>
+                  <a:picLocks noSelect="1" noRot="1" noChangeAspect="1" noMove="1" noResize="1" noEditPoints="1" noAdjustHandles="1" noChangeArrowheads="1" noChangeShapeType="1"/>
+                </p:cNvPicPr>
+                <p:nvPr/>
+              </p:nvPicPr>
+              <p:blipFill>
+                <a:blip r:embed="rId11"/>
+                <a:stretch>
+                  <a:fillRect/>
+                </a:stretch>
+              </p:blipFill>
+              <p:spPr>
+                <a:xfrm>
+                  <a:off x="4119917" y="4659265"/>
+                  <a:ext cx="1939713" cy="1091089"/>
+                </a:xfrm>
+                <a:prstGeom prst="rect">
+                  <a:avLst/>
+                </a:prstGeom>
+                <a:ln w="3175">
+                  <a:solidFill>
+                    <a:prstClr val="ltGray"/>
+                  </a:solidFill>
+                </a:ln>
+              </p:spPr>
+            </p:pic>
+          </p:grpSp>
+        </mc:Fallback>
+      </mc:AlternateContent>
     </p:spTree>
     <p:extLst>
       <p:ext uri="{BB962C8B-B14F-4D97-AF65-F5344CB8AC3E}">
-        <p14:creationId xmlns:p14="http://schemas.microsoft.com/office/powerpoint/2010/main" val="2792929478"/>
+        <p14:creationId xmlns:p14="http://schemas.microsoft.com/office/powerpoint/2010/main" val="1200276560"/>
       </p:ext>
     </p:extLst>
   </p:cSld>
@@ -5626,6 +7295,269 @@
           <p:cNvPr id="2" name="Título 1">
             <a:extLst>
               <a:ext uri="{FF2B5EF4-FFF2-40B4-BE49-F238E27FC236}">
+                <a16:creationId xmlns:a16="http://schemas.microsoft.com/office/drawing/2014/main" id="{2BEF5D6F-0D5F-2FCE-0697-F12CAE2D750B}"/>
+              </a:ext>
+            </a:extLst>
+          </p:cNvPr>
+          <p:cNvSpPr>
+            <a:spLocks noGrp="1"/>
+          </p:cNvSpPr>
+          <p:nvPr>
+            <p:ph type="title"/>
+          </p:nvPr>
+        </p:nvSpPr>
+        <p:spPr/>
+        <p:txBody>
+          <a:bodyPr/>
+          <a:lstStyle/>
+          <a:p>
+            <a:r>
+              <a:rPr lang="es-ES" dirty="0"/>
+              <a:t>Resumen ejecutivo </a:t>
+            </a:r>
+          </a:p>
+        </p:txBody>
+      </p:sp>
+      <p:sp>
+        <p:nvSpPr>
+          <p:cNvPr id="3" name="Marcador de contenido 2">
+            <a:extLst>
+              <a:ext uri="{FF2B5EF4-FFF2-40B4-BE49-F238E27FC236}">
+                <a16:creationId xmlns:a16="http://schemas.microsoft.com/office/drawing/2014/main" id="{EA2D0283-DD28-66CA-7F99-EBBDF95DA71B}"/>
+              </a:ext>
+            </a:extLst>
+          </p:cNvPr>
+          <p:cNvSpPr>
+            <a:spLocks noGrp="1"/>
+          </p:cNvSpPr>
+          <p:nvPr>
+            <p:ph idx="1"/>
+          </p:nvPr>
+        </p:nvSpPr>
+        <p:spPr/>
+        <p:txBody>
+          <a:bodyPr/>
+          <a:lstStyle/>
+          <a:p>
+            <a:r>
+              <a:rPr lang="es-ES" dirty="0"/>
+              <a:t>Desarrollamos una aplicación móvil y web para optimizar la gestión de un club de pádel. Permite a socios y administradores gestionar reservas, pagos, torneos y comunicación desde un único entorno intuitivo. El objetivo es mejorar la experiencia del usuario, reducir la carga administrativa y fomentar la participación activa en el club.</a:t>
+            </a:r>
+          </a:p>
+        </p:txBody>
+      </p:sp>
+    </p:spTree>
+    <p:extLst>
+      <p:ext uri="{BB962C8B-B14F-4D97-AF65-F5344CB8AC3E}">
+        <p14:creationId xmlns:p14="http://schemas.microsoft.com/office/powerpoint/2010/main" val="3136162162"/>
+      </p:ext>
+    </p:extLst>
+  </p:cSld>
+  <p:clrMapOvr>
+    <a:masterClrMapping/>
+  </p:clrMapOvr>
+</p:sld>
+</file>
+
+<file path=ppt/slides/slide4.xml><?xml version="1.0" encoding="utf-8"?>
+<p:sld xmlns:a="http://schemas.openxmlformats.org/drawingml/2006/main" xmlns:r="http://schemas.openxmlformats.org/officeDocument/2006/relationships" xmlns:p="http://schemas.openxmlformats.org/presentationml/2006/main">
+  <p:cSld>
+    <p:spTree>
+      <p:nvGrpSpPr>
+        <p:cNvPr id="1" name=""/>
+        <p:cNvGrpSpPr/>
+        <p:nvPr/>
+      </p:nvGrpSpPr>
+      <p:grpSpPr>
+        <a:xfrm>
+          <a:off x="0" y="0"/>
+          <a:ext cx="0" cy="0"/>
+          <a:chOff x="0" y="0"/>
+          <a:chExt cx="0" cy="0"/>
+        </a:xfrm>
+      </p:grpSpPr>
+      <p:sp>
+        <p:nvSpPr>
+          <p:cNvPr id="2" name="Título 1">
+            <a:extLst>
+              <a:ext uri="{FF2B5EF4-FFF2-40B4-BE49-F238E27FC236}">
+                <a16:creationId xmlns:a16="http://schemas.microsoft.com/office/drawing/2014/main" id="{2317448A-65CC-F782-789A-722EC5E177F1}"/>
+              </a:ext>
+            </a:extLst>
+          </p:cNvPr>
+          <p:cNvSpPr>
+            <a:spLocks noGrp="1"/>
+          </p:cNvSpPr>
+          <p:nvPr>
+            <p:ph type="title"/>
+          </p:nvPr>
+        </p:nvSpPr>
+        <p:spPr/>
+        <p:txBody>
+          <a:bodyPr/>
+          <a:lstStyle/>
+          <a:p>
+            <a:r>
+              <a:rPr lang="es-ES" dirty="0"/>
+              <a:t>Problema del mercado</a:t>
+            </a:r>
+          </a:p>
+        </p:txBody>
+      </p:sp>
+      <p:sp>
+        <p:nvSpPr>
+          <p:cNvPr id="3" name="Marcador de contenido 2">
+            <a:extLst>
+              <a:ext uri="{FF2B5EF4-FFF2-40B4-BE49-F238E27FC236}">
+                <a16:creationId xmlns:a16="http://schemas.microsoft.com/office/drawing/2014/main" id="{3CDABB05-EE6F-B384-1922-78F75533B8D1}"/>
+              </a:ext>
+            </a:extLst>
+          </p:cNvPr>
+          <p:cNvSpPr>
+            <a:spLocks noGrp="1"/>
+          </p:cNvSpPr>
+          <p:nvPr>
+            <p:ph idx="1"/>
+          </p:nvPr>
+        </p:nvSpPr>
+        <p:spPr>
+          <a:xfrm>
+            <a:off x="827424" y="2556584"/>
+            <a:ext cx="10554574" cy="3636511"/>
+          </a:xfrm>
+        </p:spPr>
+        <p:txBody>
+          <a:bodyPr>
+            <a:normAutofit fontScale="92500" lnSpcReduction="10000"/>
+          </a:bodyPr>
+          <a:lstStyle/>
+          <a:p>
+            <a:pPr marL="0" indent="0">
+              <a:buNone/>
+            </a:pPr>
+            <a:r>
+              <a:rPr lang="es-ES" dirty="0"/>
+              <a:t>Empresa de pádel busca:</a:t>
+            </a:r>
+          </a:p>
+          <a:p>
+            <a:pPr marL="0" indent="0">
+              <a:buNone/>
+            </a:pPr>
+            <a:r>
+              <a:rPr lang="es-ES" dirty="0"/>
+              <a:t>	</a:t>
+            </a:r>
+          </a:p>
+          <a:p>
+            <a:pPr>
+              <a:buFont typeface="Courier New" panose="02070309020205020404" pitchFamily="49" charset="0"/>
+              <a:buChar char="o"/>
+            </a:pPr>
+            <a:r>
+              <a:rPr lang="es-ES" dirty="0"/>
+              <a:t>Aumentar la productividad y mejorar su huella ecológica pasando de la gestión de usuarios y reservas de forma analógica (papel y archivadores) a gestión web y vía APP</a:t>
+            </a:r>
+          </a:p>
+          <a:p>
+            <a:pPr>
+              <a:buFont typeface="Courier New" panose="02070309020205020404" pitchFamily="49" charset="0"/>
+              <a:buChar char="o"/>
+            </a:pPr>
+            <a:r>
+              <a:rPr lang="es-ES" dirty="0"/>
+              <a:t>Romper la brecha tecnológica respecto a sus principales competidores que ya usan una forma mas moderna e informatizada de gestión de recursos</a:t>
+            </a:r>
+          </a:p>
+          <a:p>
+            <a:pPr>
+              <a:buFont typeface="Courier New" panose="02070309020205020404" pitchFamily="49" charset="0"/>
+              <a:buChar char="o"/>
+            </a:pPr>
+            <a:r>
+              <a:rPr lang="es-ES" dirty="0"/>
+              <a:t>Facilitar la escalabilidad de implementación de nuevas pistas y usuarios ya sea de usuarios nuevos o ya existentes</a:t>
+            </a:r>
+          </a:p>
+          <a:p>
+            <a:pPr>
+              <a:buFont typeface="Courier New" panose="02070309020205020404" pitchFamily="49" charset="0"/>
+              <a:buChar char="o"/>
+            </a:pPr>
+            <a:r>
+              <a:rPr lang="es-ES" dirty="0"/>
+              <a:t>Gestión manual de reservas y pagos</a:t>
+            </a:r>
+          </a:p>
+          <a:p>
+            <a:pPr>
+              <a:buFont typeface="Courier New" panose="02070309020205020404" pitchFamily="49" charset="0"/>
+              <a:buChar char="o"/>
+            </a:pPr>
+            <a:r>
+              <a:rPr lang="es-ES" dirty="0"/>
+              <a:t>Comunicación dispersa (WhatsApp, email, llamadas)</a:t>
+            </a:r>
+          </a:p>
+          <a:p>
+            <a:pPr>
+              <a:buFont typeface="Courier New" panose="02070309020205020404" pitchFamily="49" charset="0"/>
+              <a:buChar char="o"/>
+            </a:pPr>
+            <a:r>
+              <a:rPr lang="es-ES" dirty="0"/>
+              <a:t>Dificultades para obtener los datos sobre el uso de pistas y asistencia</a:t>
+            </a:r>
+          </a:p>
+          <a:p>
+            <a:pPr marL="0" indent="0">
+              <a:buNone/>
+            </a:pPr>
+            <a:endParaRPr lang="es-ES" dirty="0"/>
+          </a:p>
+          <a:p>
+            <a:pPr marL="0" indent="0">
+              <a:buNone/>
+            </a:pPr>
+            <a:endParaRPr lang="es-ES" dirty="0"/>
+          </a:p>
+        </p:txBody>
+      </p:sp>
+    </p:spTree>
+    <p:extLst>
+      <p:ext uri="{BB962C8B-B14F-4D97-AF65-F5344CB8AC3E}">
+        <p14:creationId xmlns:p14="http://schemas.microsoft.com/office/powerpoint/2010/main" val="2792929478"/>
+      </p:ext>
+    </p:extLst>
+  </p:cSld>
+  <p:clrMapOvr>
+    <a:masterClrMapping/>
+  </p:clrMapOvr>
+</p:sld>
+</file>
+
+<file path=ppt/slides/slide5.xml><?xml version="1.0" encoding="utf-8"?>
+<p:sld xmlns:a="http://schemas.openxmlformats.org/drawingml/2006/main" xmlns:r="http://schemas.openxmlformats.org/officeDocument/2006/relationships" xmlns:p="http://schemas.openxmlformats.org/presentationml/2006/main">
+  <p:cSld>
+    <p:spTree>
+      <p:nvGrpSpPr>
+        <p:cNvPr id="1" name=""/>
+        <p:cNvGrpSpPr/>
+        <p:nvPr/>
+      </p:nvGrpSpPr>
+      <p:grpSpPr>
+        <a:xfrm>
+          <a:off x="0" y="0"/>
+          <a:ext cx="0" cy="0"/>
+          <a:chOff x="0" y="0"/>
+          <a:chExt cx="0" cy="0"/>
+        </a:xfrm>
+      </p:grpSpPr>
+      <p:sp>
+        <p:nvSpPr>
+          <p:cNvPr id="2" name="Título 1">
+            <a:extLst>
+              <a:ext uri="{FF2B5EF4-FFF2-40B4-BE49-F238E27FC236}">
                 <a16:creationId xmlns:a16="http://schemas.microsoft.com/office/drawing/2014/main" id="{55AB11FD-89A3-00F2-A3BB-8781556D78E7}"/>
               </a:ext>
             </a:extLst>
@@ -5682,6 +7614,24 @@
             </a:r>
           </a:p>
           <a:p>
+            <a:r>
+              <a:rPr lang="es-ES" dirty="0"/>
+              <a:t>Digitalizar la gestión del club</a:t>
+            </a:r>
+          </a:p>
+          <a:p>
+            <a:r>
+              <a:rPr lang="es-ES" dirty="0"/>
+              <a:t>Facilitar la reserva de pistas </a:t>
+            </a:r>
+          </a:p>
+          <a:p>
+            <a:r>
+              <a:rPr lang="es-ES" dirty="0"/>
+              <a:t>Centralizar la comunicación con los socios</a:t>
+            </a:r>
+          </a:p>
+          <a:p>
             <a:pPr marL="0" indent="0">
               <a:buNone/>
             </a:pPr>
@@ -5693,6 +7643,449 @@
     <p:extLst>
       <p:ext uri="{BB962C8B-B14F-4D97-AF65-F5344CB8AC3E}">
         <p14:creationId xmlns:p14="http://schemas.microsoft.com/office/powerpoint/2010/main" val="827890208"/>
+      </p:ext>
+    </p:extLst>
+  </p:cSld>
+  <p:clrMapOvr>
+    <a:masterClrMapping/>
+  </p:clrMapOvr>
+</p:sld>
+</file>
+
+<file path=ppt/slides/slide6.xml><?xml version="1.0" encoding="utf-8"?>
+<p:sld xmlns:a="http://schemas.openxmlformats.org/drawingml/2006/main" xmlns:r="http://schemas.openxmlformats.org/officeDocument/2006/relationships" xmlns:p="http://schemas.openxmlformats.org/presentationml/2006/main">
+  <p:cSld>
+    <p:spTree>
+      <p:nvGrpSpPr>
+        <p:cNvPr id="1" name=""/>
+        <p:cNvGrpSpPr/>
+        <p:nvPr/>
+      </p:nvGrpSpPr>
+      <p:grpSpPr>
+        <a:xfrm>
+          <a:off x="0" y="0"/>
+          <a:ext cx="0" cy="0"/>
+          <a:chOff x="0" y="0"/>
+          <a:chExt cx="0" cy="0"/>
+        </a:xfrm>
+      </p:grpSpPr>
+      <p:sp>
+        <p:nvSpPr>
+          <p:cNvPr id="2" name="Título 1">
+            <a:extLst>
+              <a:ext uri="{FF2B5EF4-FFF2-40B4-BE49-F238E27FC236}">
+                <a16:creationId xmlns:a16="http://schemas.microsoft.com/office/drawing/2014/main" id="{2CD5EB95-88D6-9F7C-9E71-BF96C6D03A79}"/>
+              </a:ext>
+            </a:extLst>
+          </p:cNvPr>
+          <p:cNvSpPr>
+            <a:spLocks noGrp="1"/>
+          </p:cNvSpPr>
+          <p:nvPr>
+            <p:ph type="title"/>
+          </p:nvPr>
+        </p:nvSpPr>
+        <p:spPr/>
+        <p:txBody>
+          <a:bodyPr/>
+          <a:lstStyle/>
+          <a:p>
+            <a:r>
+              <a:rPr lang="es-ES" dirty="0"/>
+              <a:t>Principales funciones de la app</a:t>
+            </a:r>
+          </a:p>
+        </p:txBody>
+      </p:sp>
+      <p:sp>
+        <p:nvSpPr>
+          <p:cNvPr id="3" name="Marcador de contenido 2">
+            <a:extLst>
+              <a:ext uri="{FF2B5EF4-FFF2-40B4-BE49-F238E27FC236}">
+                <a16:creationId xmlns:a16="http://schemas.microsoft.com/office/drawing/2014/main" id="{A1AD03D1-C769-3308-AD52-FACE4DD48618}"/>
+              </a:ext>
+            </a:extLst>
+          </p:cNvPr>
+          <p:cNvSpPr>
+            <a:spLocks noGrp="1"/>
+          </p:cNvSpPr>
+          <p:nvPr>
+            <p:ph idx="1"/>
+          </p:nvPr>
+        </p:nvSpPr>
+        <p:spPr/>
+        <p:txBody>
+          <a:bodyPr/>
+          <a:lstStyle/>
+          <a:p>
+            <a:r>
+              <a:rPr lang="es-ES" dirty="0"/>
+              <a:t>Reserva de pistas: Ver disponibilidad y reservar desde el móvil</a:t>
+            </a:r>
+          </a:p>
+          <a:p>
+            <a:endParaRPr lang="es-ES" dirty="0"/>
+          </a:p>
+          <a:p>
+            <a:r>
+              <a:rPr lang="es-ES" dirty="0"/>
+              <a:t>Perfil de usuario: Historial de juego y datos personales</a:t>
+            </a:r>
+          </a:p>
+          <a:p>
+            <a:endParaRPr lang="es-ES" dirty="0"/>
+          </a:p>
+          <a:p>
+            <a:r>
+              <a:rPr lang="es-ES" dirty="0"/>
+              <a:t>Notificaciones del club: Avisos de eventos, cambios y recordatorios</a:t>
+            </a:r>
+          </a:p>
+        </p:txBody>
+      </p:sp>
+    </p:spTree>
+    <p:extLst>
+      <p:ext uri="{BB962C8B-B14F-4D97-AF65-F5344CB8AC3E}">
+        <p14:creationId xmlns:p14="http://schemas.microsoft.com/office/powerpoint/2010/main" val="3616483802"/>
+      </p:ext>
+    </p:extLst>
+  </p:cSld>
+  <p:clrMapOvr>
+    <a:masterClrMapping/>
+  </p:clrMapOvr>
+</p:sld>
+</file>
+
+<file path=ppt/slides/slide7.xml><?xml version="1.0" encoding="utf-8"?>
+<p:sld xmlns:a="http://schemas.openxmlformats.org/drawingml/2006/main" xmlns:r="http://schemas.openxmlformats.org/officeDocument/2006/relationships" xmlns:p="http://schemas.openxmlformats.org/presentationml/2006/main">
+  <p:cSld>
+    <p:spTree>
+      <p:nvGrpSpPr>
+        <p:cNvPr id="1" name=""/>
+        <p:cNvGrpSpPr/>
+        <p:nvPr/>
+      </p:nvGrpSpPr>
+      <p:grpSpPr>
+        <a:xfrm>
+          <a:off x="0" y="0"/>
+          <a:ext cx="0" cy="0"/>
+          <a:chOff x="0" y="0"/>
+          <a:chExt cx="0" cy="0"/>
+        </a:xfrm>
+      </p:grpSpPr>
+      <p:sp>
+        <p:nvSpPr>
+          <p:cNvPr id="2" name="Título 1">
+            <a:extLst>
+              <a:ext uri="{FF2B5EF4-FFF2-40B4-BE49-F238E27FC236}">
+                <a16:creationId xmlns:a16="http://schemas.microsoft.com/office/drawing/2014/main" id="{FCADAEDF-6EB8-0708-9ADC-094AFA5FF3A3}"/>
+              </a:ext>
+            </a:extLst>
+          </p:cNvPr>
+          <p:cNvSpPr>
+            <a:spLocks noGrp="1"/>
+          </p:cNvSpPr>
+          <p:nvPr>
+            <p:ph type="title"/>
+          </p:nvPr>
+        </p:nvSpPr>
+        <p:spPr/>
+        <p:txBody>
+          <a:bodyPr/>
+          <a:lstStyle/>
+          <a:p>
+            <a:r>
+              <a:rPr lang="es-ES" dirty="0"/>
+              <a:t>Principales funciones de la web </a:t>
+            </a:r>
+          </a:p>
+        </p:txBody>
+      </p:sp>
+      <p:sp>
+        <p:nvSpPr>
+          <p:cNvPr id="3" name="Marcador de contenido 2">
+            <a:extLst>
+              <a:ext uri="{FF2B5EF4-FFF2-40B4-BE49-F238E27FC236}">
+                <a16:creationId xmlns:a16="http://schemas.microsoft.com/office/drawing/2014/main" id="{54FEB91E-99DB-20F7-8954-40C8E90F8FA0}"/>
+              </a:ext>
+            </a:extLst>
+          </p:cNvPr>
+          <p:cNvSpPr>
+            <a:spLocks noGrp="1"/>
+          </p:cNvSpPr>
+          <p:nvPr>
+            <p:ph idx="1"/>
+          </p:nvPr>
+        </p:nvSpPr>
+        <p:spPr/>
+        <p:txBody>
+          <a:bodyPr/>
+          <a:lstStyle/>
+          <a:p>
+            <a:r>
+              <a:rPr lang="es-ES" dirty="0"/>
+              <a:t>Vista global del calendario de pistas</a:t>
+            </a:r>
+          </a:p>
+          <a:p>
+            <a:r>
+              <a:rPr lang="es-ES" dirty="0"/>
+              <a:t>Modificación y cancelación de reservas</a:t>
+            </a:r>
+          </a:p>
+          <a:p>
+            <a:r>
+              <a:rPr lang="es-ES" dirty="0"/>
+              <a:t>Asignación manual de pistas a socios</a:t>
+            </a:r>
+          </a:p>
+          <a:p>
+            <a:r>
+              <a:rPr lang="es-ES" dirty="0"/>
+              <a:t>Alta, baja y edición de socios</a:t>
+            </a:r>
+          </a:p>
+          <a:p>
+            <a:r>
+              <a:rPr lang="es-ES" dirty="0"/>
+              <a:t>Asignación de roles: socio, administrador</a:t>
+            </a:r>
+          </a:p>
+          <a:p>
+            <a:r>
+              <a:rPr lang="es-ES" dirty="0"/>
+              <a:t>Envío de notificaciones push</a:t>
+            </a:r>
+          </a:p>
+          <a:p>
+            <a:r>
+              <a:rPr lang="es-ES" dirty="0"/>
+              <a:t>Uso de pistas por franja horaria</a:t>
+            </a:r>
+          </a:p>
+          <a:p>
+            <a:r>
+              <a:rPr lang="es-ES" dirty="0"/>
+              <a:t>Horarios y disponibilidad de pistas</a:t>
+            </a:r>
+          </a:p>
+        </p:txBody>
+      </p:sp>
+    </p:spTree>
+    <p:extLst>
+      <p:ext uri="{BB962C8B-B14F-4D97-AF65-F5344CB8AC3E}">
+        <p14:creationId xmlns:p14="http://schemas.microsoft.com/office/powerpoint/2010/main" val="1831433572"/>
+      </p:ext>
+    </p:extLst>
+  </p:cSld>
+  <p:clrMapOvr>
+    <a:masterClrMapping/>
+  </p:clrMapOvr>
+</p:sld>
+</file>
+
+<file path=ppt/slides/slide8.xml><?xml version="1.0" encoding="utf-8"?>
+<p:sld xmlns:a="http://schemas.openxmlformats.org/drawingml/2006/main" xmlns:r="http://schemas.openxmlformats.org/officeDocument/2006/relationships" xmlns:p="http://schemas.openxmlformats.org/presentationml/2006/main">
+  <p:cSld>
+    <p:spTree>
+      <p:nvGrpSpPr>
+        <p:cNvPr id="1" name=""/>
+        <p:cNvGrpSpPr/>
+        <p:nvPr/>
+      </p:nvGrpSpPr>
+      <p:grpSpPr>
+        <a:xfrm>
+          <a:off x="0" y="0"/>
+          <a:ext cx="0" cy="0"/>
+          <a:chOff x="0" y="0"/>
+          <a:chExt cx="0" cy="0"/>
+        </a:xfrm>
+      </p:grpSpPr>
+      <p:sp>
+        <p:nvSpPr>
+          <p:cNvPr id="2" name="Título 1">
+            <a:extLst>
+              <a:ext uri="{FF2B5EF4-FFF2-40B4-BE49-F238E27FC236}">
+                <a16:creationId xmlns:a16="http://schemas.microsoft.com/office/drawing/2014/main" id="{65F3827D-E1CD-5983-A7C2-DAC0D26E5B6E}"/>
+              </a:ext>
+            </a:extLst>
+          </p:cNvPr>
+          <p:cNvSpPr>
+            <a:spLocks noGrp="1"/>
+          </p:cNvSpPr>
+          <p:nvPr>
+            <p:ph type="title"/>
+          </p:nvPr>
+        </p:nvSpPr>
+        <p:spPr/>
+        <p:txBody>
+          <a:bodyPr/>
+          <a:lstStyle/>
+          <a:p>
+            <a:r>
+              <a:rPr lang="es-ES" dirty="0"/>
+              <a:t>Público Objetivo</a:t>
+            </a:r>
+          </a:p>
+        </p:txBody>
+      </p:sp>
+      <p:sp>
+        <p:nvSpPr>
+          <p:cNvPr id="3" name="Marcador de contenido 2">
+            <a:extLst>
+              <a:ext uri="{FF2B5EF4-FFF2-40B4-BE49-F238E27FC236}">
+                <a16:creationId xmlns:a16="http://schemas.microsoft.com/office/drawing/2014/main" id="{69C14881-C429-F3E4-FFCA-DCB67F1B9B51}"/>
+              </a:ext>
+            </a:extLst>
+          </p:cNvPr>
+          <p:cNvSpPr>
+            <a:spLocks noGrp="1"/>
+          </p:cNvSpPr>
+          <p:nvPr>
+            <p:ph idx="1"/>
+          </p:nvPr>
+        </p:nvSpPr>
+        <p:spPr/>
+        <p:txBody>
+          <a:bodyPr/>
+          <a:lstStyle/>
+          <a:p>
+            <a:r>
+              <a:rPr lang="es-ES" dirty="0"/>
+              <a:t>Socios del club: reservas, pagos, notificaciones</a:t>
+            </a:r>
+          </a:p>
+          <a:p>
+            <a:r>
+              <a:rPr lang="es-ES" dirty="0"/>
+              <a:t>Administradores: gestión de usuarios, pistas, cobros</a:t>
+            </a:r>
+          </a:p>
+          <a:p>
+            <a:r>
+              <a:rPr lang="es-ES" dirty="0"/>
+              <a:t>Nuevos usuarios: acceso fácil y registro online</a:t>
+            </a:r>
+          </a:p>
+          <a:p>
+            <a:endParaRPr lang="es-ES" dirty="0"/>
+          </a:p>
+        </p:txBody>
+      </p:sp>
+    </p:spTree>
+    <p:extLst>
+      <p:ext uri="{BB962C8B-B14F-4D97-AF65-F5344CB8AC3E}">
+        <p14:creationId xmlns:p14="http://schemas.microsoft.com/office/powerpoint/2010/main" val="4089154397"/>
+      </p:ext>
+    </p:extLst>
+  </p:cSld>
+  <p:clrMapOvr>
+    <a:masterClrMapping/>
+  </p:clrMapOvr>
+</p:sld>
+</file>
+
+<file path=ppt/slides/slide9.xml><?xml version="1.0" encoding="utf-8"?>
+<p:sld xmlns:a="http://schemas.openxmlformats.org/drawingml/2006/main" xmlns:r="http://schemas.openxmlformats.org/officeDocument/2006/relationships" xmlns:p="http://schemas.openxmlformats.org/presentationml/2006/main">
+  <p:cSld>
+    <p:spTree>
+      <p:nvGrpSpPr>
+        <p:cNvPr id="1" name=""/>
+        <p:cNvGrpSpPr/>
+        <p:nvPr/>
+      </p:nvGrpSpPr>
+      <p:grpSpPr>
+        <a:xfrm>
+          <a:off x="0" y="0"/>
+          <a:ext cx="0" cy="0"/>
+          <a:chOff x="0" y="0"/>
+          <a:chExt cx="0" cy="0"/>
+        </a:xfrm>
+      </p:grpSpPr>
+      <p:sp>
+        <p:nvSpPr>
+          <p:cNvPr id="2" name="Título 1">
+            <a:extLst>
+              <a:ext uri="{FF2B5EF4-FFF2-40B4-BE49-F238E27FC236}">
+                <a16:creationId xmlns:a16="http://schemas.microsoft.com/office/drawing/2014/main" id="{76057C7D-DD93-5757-0AE8-893A3CA4CD1E}"/>
+              </a:ext>
+            </a:extLst>
+          </p:cNvPr>
+          <p:cNvSpPr>
+            <a:spLocks noGrp="1"/>
+          </p:cNvSpPr>
+          <p:nvPr>
+            <p:ph type="title"/>
+          </p:nvPr>
+        </p:nvSpPr>
+        <p:spPr/>
+        <p:txBody>
+          <a:bodyPr/>
+          <a:lstStyle/>
+          <a:p>
+            <a:r>
+              <a:rPr lang="es-ES" dirty="0"/>
+              <a:t>Funcionalidades Clave</a:t>
+            </a:r>
+          </a:p>
+        </p:txBody>
+      </p:sp>
+      <p:sp>
+        <p:nvSpPr>
+          <p:cNvPr id="3" name="Marcador de contenido 2">
+            <a:extLst>
+              <a:ext uri="{FF2B5EF4-FFF2-40B4-BE49-F238E27FC236}">
+                <a16:creationId xmlns:a16="http://schemas.microsoft.com/office/drawing/2014/main" id="{D4738AD5-7C92-B23A-5FF0-F29AA1FD0769}"/>
+              </a:ext>
+            </a:extLst>
+          </p:cNvPr>
+          <p:cNvSpPr>
+            <a:spLocks noGrp="1"/>
+          </p:cNvSpPr>
+          <p:nvPr>
+            <p:ph idx="1"/>
+          </p:nvPr>
+        </p:nvSpPr>
+        <p:spPr/>
+        <p:txBody>
+          <a:bodyPr/>
+          <a:lstStyle/>
+          <a:p>
+            <a:r>
+              <a:rPr lang="es-ES" dirty="0"/>
+              <a:t>Reserva de pistas en tiempo real</a:t>
+            </a:r>
+          </a:p>
+          <a:p>
+            <a:r>
+              <a:rPr lang="es-ES" dirty="0"/>
+              <a:t>Pagos online y control de cuotas</a:t>
+            </a:r>
+          </a:p>
+          <a:p>
+            <a:r>
+              <a:rPr lang="es-ES" dirty="0"/>
+              <a:t>Notificaciones push y recordatorios</a:t>
+            </a:r>
+          </a:p>
+          <a:p>
+            <a:r>
+              <a:rPr lang="es-ES" dirty="0"/>
+              <a:t>Perfil de usuario y estadísticas personales</a:t>
+            </a:r>
+          </a:p>
+          <a:p>
+            <a:r>
+              <a:rPr lang="es-ES" dirty="0"/>
+              <a:t>Panel de administración web</a:t>
+            </a:r>
+          </a:p>
+        </p:txBody>
+      </p:sp>
+    </p:spTree>
+    <p:extLst>
+      <p:ext uri="{BB962C8B-B14F-4D97-AF65-F5344CB8AC3E}">
+        <p14:creationId xmlns:p14="http://schemas.microsoft.com/office/powerpoint/2010/main" val="570137195"/>
       </p:ext>
     </p:extLst>
   </p:cSld>
